--- a/faucets.pptx
+++ b/faucets.pptx
@@ -5,10 +5,11 @@
     <p:sldMasterId id="2147483648" r:id="rId1"/>
   </p:sldMasterIdLst>
   <p:notesMasterIdLst>
-    <p:notesMasterId r:id="rId3"/>
+    <p:notesMasterId r:id="rId4"/>
   </p:notesMasterIdLst>
   <p:sldIdLst>
     <p:sldId id="261" r:id="rId2"/>
+    <p:sldId id="262" r:id="rId3"/>
   </p:sldIdLst>
   <p:sldSz cx="12192000" cy="6858000"/>
   <p:notesSz cx="6858000" cy="9144000"/>
@@ -197,7 +198,7 @@
           <a:p>
             <a:fld id="{D2843BDE-B8C0-934E-9704-CBA3B88C1FB8}" type="datetimeFigureOut">
               <a:rPr lang="en-US" smtClean="0"/>
-              <a:t>1/30/23</a:t>
+              <a:t>1/31/24</a:t>
             </a:fld>
             <a:endParaRPr lang="en-US"/>
           </a:p>
@@ -548,6 +549,114 @@
 </p:notes>
 </file>
 
+<file path=ppt/notesSlides/notesSlide2.xml><?xml version="1.0" encoding="utf-8"?>
+<p:notes xmlns:a="http://schemas.openxmlformats.org/drawingml/2006/main" xmlns:r="http://schemas.openxmlformats.org/officeDocument/2006/relationships" xmlns:p="http://schemas.openxmlformats.org/presentationml/2006/main">
+  <p:cSld>
+    <p:spTree>
+      <p:nvGrpSpPr>
+        <p:cNvPr id="1" name="">
+          <a:extLst>
+            <a:ext uri="{FF2B5EF4-FFF2-40B4-BE49-F238E27FC236}">
+              <a16:creationId xmlns:a16="http://schemas.microsoft.com/office/drawing/2014/main" id="{7FA47F6B-AB2B-AEBE-771D-CE8528D86459}"/>
+            </a:ext>
+          </a:extLst>
+        </p:cNvPr>
+        <p:cNvGrpSpPr/>
+        <p:nvPr/>
+      </p:nvGrpSpPr>
+      <p:grpSpPr>
+        <a:xfrm>
+          <a:off x="0" y="0"/>
+          <a:ext cx="0" cy="0"/>
+          <a:chOff x="0" y="0"/>
+          <a:chExt cx="0" cy="0"/>
+        </a:xfrm>
+      </p:grpSpPr>
+      <p:sp>
+        <p:nvSpPr>
+          <p:cNvPr id="2" name="Slide Image Placeholder 1">
+            <a:extLst>
+              <a:ext uri="{FF2B5EF4-FFF2-40B4-BE49-F238E27FC236}">
+                <a16:creationId xmlns:a16="http://schemas.microsoft.com/office/drawing/2014/main" id="{CF9E0912-5BBA-6C2C-745A-A784E53759CA}"/>
+              </a:ext>
+            </a:extLst>
+          </p:cNvPr>
+          <p:cNvSpPr>
+            <a:spLocks noGrp="1" noRot="1" noChangeAspect="1"/>
+          </p:cNvSpPr>
+          <p:nvPr>
+            <p:ph type="sldImg"/>
+          </p:nvPr>
+        </p:nvSpPr>
+        <p:spPr/>
+      </p:sp>
+      <p:sp>
+        <p:nvSpPr>
+          <p:cNvPr id="3" name="Notes Placeholder 2">
+            <a:extLst>
+              <a:ext uri="{FF2B5EF4-FFF2-40B4-BE49-F238E27FC236}">
+                <a16:creationId xmlns:a16="http://schemas.microsoft.com/office/drawing/2014/main" id="{126F4150-082E-79C4-1F3A-2BD8324AD49A}"/>
+              </a:ext>
+            </a:extLst>
+          </p:cNvPr>
+          <p:cNvSpPr>
+            <a:spLocks noGrp="1"/>
+          </p:cNvSpPr>
+          <p:nvPr>
+            <p:ph type="body" idx="1"/>
+          </p:nvPr>
+        </p:nvSpPr>
+        <p:spPr/>
+        <p:txBody>
+          <a:bodyPr/>
+          <a:lstStyle/>
+          <a:p>
+            <a:endParaRPr lang="en-US" dirty="0"/>
+          </a:p>
+        </p:txBody>
+      </p:sp>
+      <p:sp>
+        <p:nvSpPr>
+          <p:cNvPr id="4" name="Slide Number Placeholder 3">
+            <a:extLst>
+              <a:ext uri="{FF2B5EF4-FFF2-40B4-BE49-F238E27FC236}">
+                <a16:creationId xmlns:a16="http://schemas.microsoft.com/office/drawing/2014/main" id="{C7854A81-3A6D-D606-BC83-946B2A91A259}"/>
+              </a:ext>
+            </a:extLst>
+          </p:cNvPr>
+          <p:cNvSpPr>
+            <a:spLocks noGrp="1"/>
+          </p:cNvSpPr>
+          <p:nvPr>
+            <p:ph type="sldNum" sz="quarter" idx="5"/>
+          </p:nvPr>
+        </p:nvSpPr>
+        <p:spPr/>
+        <p:txBody>
+          <a:bodyPr/>
+          <a:lstStyle/>
+          <a:p>
+            <a:fld id="{BA8B91EE-EA77-074C-ABDE-BAE6359B4E98}" type="slidenum">
+              <a:rPr lang="en-US" smtClean="0"/>
+              <a:t>2</a:t>
+            </a:fld>
+            <a:endParaRPr lang="en-US"/>
+          </a:p>
+        </p:txBody>
+      </p:sp>
+    </p:spTree>
+    <p:extLst>
+      <p:ext uri="{BB962C8B-B14F-4D97-AF65-F5344CB8AC3E}">
+        <p14:creationId xmlns:p14="http://schemas.microsoft.com/office/powerpoint/2010/main" val="3071073222"/>
+      </p:ext>
+    </p:extLst>
+  </p:cSld>
+  <p:clrMapOvr>
+    <a:masterClrMapping/>
+  </p:clrMapOvr>
+</p:notes>
+</file>
+
 <file path=ppt/slideLayouts/slideLayout1.xml><?xml version="1.0" encoding="utf-8"?>
 <p:sldLayout xmlns:a="http://schemas.openxmlformats.org/drawingml/2006/main" xmlns:r="http://schemas.openxmlformats.org/officeDocument/2006/relationships" xmlns:p="http://schemas.openxmlformats.org/presentationml/2006/main" type="title" preserve="1">
   <p:cSld name="Title Slide">
@@ -694,7 +803,7 @@
           <a:lstStyle/>
           <a:p>
             <a:fld id="{5F491023-0B0A-7041-9F06-D25A50EF063B}" type="datetimeFigureOut">
-              <a:t>1/30/23</a:t>
+              <a:t>1/31/24</a:t>
             </a:fld>
             <a:endParaRPr lang="en-US"/>
           </a:p>
@@ -890,7 +999,7 @@
           <a:lstStyle/>
           <a:p>
             <a:fld id="{5F491023-0B0A-7041-9F06-D25A50EF063B}" type="datetimeFigureOut">
-              <a:t>1/30/23</a:t>
+              <a:t>1/31/24</a:t>
             </a:fld>
             <a:endParaRPr lang="en-US"/>
           </a:p>
@@ -1096,7 +1205,7 @@
           <a:lstStyle/>
           <a:p>
             <a:fld id="{5F491023-0B0A-7041-9F06-D25A50EF063B}" type="datetimeFigureOut">
-              <a:t>1/30/23</a:t>
+              <a:t>1/31/24</a:t>
             </a:fld>
             <a:endParaRPr lang="en-US"/>
           </a:p>
@@ -1292,7 +1401,7 @@
           <a:lstStyle/>
           <a:p>
             <a:fld id="{5F491023-0B0A-7041-9F06-D25A50EF063B}" type="datetimeFigureOut">
-              <a:t>1/30/23</a:t>
+              <a:t>1/31/24</a:t>
             </a:fld>
             <a:endParaRPr lang="en-US"/>
           </a:p>
@@ -1565,7 +1674,7 @@
           <a:lstStyle/>
           <a:p>
             <a:fld id="{5F491023-0B0A-7041-9F06-D25A50EF063B}" type="datetimeFigureOut">
-              <a:t>1/30/23</a:t>
+              <a:t>1/31/24</a:t>
             </a:fld>
             <a:endParaRPr lang="en-US"/>
           </a:p>
@@ -1828,7 +1937,7 @@
           <a:lstStyle/>
           <a:p>
             <a:fld id="{5F491023-0B0A-7041-9F06-D25A50EF063B}" type="datetimeFigureOut">
-              <a:t>1/30/23</a:t>
+              <a:t>1/31/24</a:t>
             </a:fld>
             <a:endParaRPr lang="en-US"/>
           </a:p>
@@ -2238,7 +2347,7 @@
           <a:lstStyle/>
           <a:p>
             <a:fld id="{5F491023-0B0A-7041-9F06-D25A50EF063B}" type="datetimeFigureOut">
-              <a:t>1/30/23</a:t>
+              <a:t>1/31/24</a:t>
             </a:fld>
             <a:endParaRPr lang="en-US"/>
           </a:p>
@@ -2377,7 +2486,7 @@
           <a:lstStyle/>
           <a:p>
             <a:fld id="{5F491023-0B0A-7041-9F06-D25A50EF063B}" type="datetimeFigureOut">
-              <a:t>1/30/23</a:t>
+              <a:t>1/31/24</a:t>
             </a:fld>
             <a:endParaRPr lang="en-US"/>
           </a:p>
@@ -2488,7 +2597,7 @@
           <a:lstStyle/>
           <a:p>
             <a:fld id="{5F491023-0B0A-7041-9F06-D25A50EF063B}" type="datetimeFigureOut">
-              <a:t>1/30/23</a:t>
+              <a:t>1/31/24</a:t>
             </a:fld>
             <a:endParaRPr lang="en-US"/>
           </a:p>
@@ -2797,7 +2906,7 @@
           <a:lstStyle/>
           <a:p>
             <a:fld id="{5F491023-0B0A-7041-9F06-D25A50EF063B}" type="datetimeFigureOut">
-              <a:t>1/30/23</a:t>
+              <a:t>1/31/24</a:t>
             </a:fld>
             <a:endParaRPr lang="en-US"/>
           </a:p>
@@ -3083,7 +3192,7 @@
           <a:lstStyle/>
           <a:p>
             <a:fld id="{5F491023-0B0A-7041-9F06-D25A50EF063B}" type="datetimeFigureOut">
-              <a:t>1/30/23</a:t>
+              <a:t>1/31/24</a:t>
             </a:fld>
             <a:endParaRPr lang="en-US"/>
           </a:p>
@@ -3322,7 +3431,7 @@
           </a:lstStyle>
           <a:p>
             <a:fld id="{5F491023-0B0A-7041-9F06-D25A50EF063B}" type="datetimeFigureOut">
-              <a:t>1/30/23</a:t>
+              <a:t>1/31/24</a:t>
             </a:fld>
             <a:endParaRPr lang="en-US"/>
           </a:p>
@@ -3833,7 +3942,13 @@
           <p:nvPr/>
         </p:nvPicPr>
         <p:blipFill>
-          <a:blip r:embed="rId3"/>
+          <a:blip r:embed="rId3" cstate="email">
+            <a:extLst>
+              <a:ext uri="{28A0092B-C50C-407E-A947-70E740481C1C}">
+                <a14:useLocalDpi xmlns:a14="http://schemas.microsoft.com/office/drawing/2010/main"/>
+              </a:ext>
+            </a:extLst>
+          </a:blip>
           <a:stretch>
             <a:fillRect/>
           </a:stretch>
@@ -3863,7 +3978,13 @@
           <p:nvPr/>
         </p:nvPicPr>
         <p:blipFill>
-          <a:blip r:embed="rId4"/>
+          <a:blip r:embed="rId4" cstate="email">
+            <a:extLst>
+              <a:ext uri="{28A0092B-C50C-407E-A947-70E740481C1C}">
+                <a14:useLocalDpi xmlns:a14="http://schemas.microsoft.com/office/drawing/2010/main"/>
+              </a:ext>
+            </a:extLst>
+          </a:blip>
           <a:stretch>
             <a:fillRect/>
           </a:stretch>
@@ -3928,7 +4049,13 @@
           <p:nvPr/>
         </p:nvPicPr>
         <p:blipFill>
-          <a:blip r:embed="rId5"/>
+          <a:blip r:embed="rId5" cstate="email">
+            <a:extLst>
+              <a:ext uri="{28A0092B-C50C-407E-A947-70E740481C1C}">
+                <a14:useLocalDpi xmlns:a14="http://schemas.microsoft.com/office/drawing/2010/main"/>
+              </a:ext>
+            </a:extLst>
+          </a:blip>
           <a:stretch>
             <a:fillRect/>
           </a:stretch>
@@ -4049,7 +4176,13 @@
           <p:nvPr/>
         </p:nvPicPr>
         <p:blipFill>
-          <a:blip r:embed="rId6"/>
+          <a:blip r:embed="rId6" cstate="email">
+            <a:extLst>
+              <a:ext uri="{28A0092B-C50C-407E-A947-70E740481C1C}">
+                <a14:useLocalDpi xmlns:a14="http://schemas.microsoft.com/office/drawing/2010/main"/>
+              </a:ext>
+            </a:extLst>
+          </a:blip>
           <a:stretch>
             <a:fillRect/>
           </a:stretch>
@@ -4120,7 +4253,13 @@
           <p:nvPr/>
         </p:nvPicPr>
         <p:blipFill>
-          <a:blip r:embed="rId7"/>
+          <a:blip r:embed="rId7" cstate="email">
+            <a:extLst>
+              <a:ext uri="{28A0092B-C50C-407E-A947-70E740481C1C}">
+                <a14:useLocalDpi xmlns:a14="http://schemas.microsoft.com/office/drawing/2010/main"/>
+              </a:ext>
+            </a:extLst>
+          </a:blip>
           <a:stretch>
             <a:fillRect/>
           </a:stretch>
@@ -4191,7 +4330,13 @@
           <p:nvPr/>
         </p:nvPicPr>
         <p:blipFill>
-          <a:blip r:embed="rId8"/>
+          <a:blip r:embed="rId8" cstate="email">
+            <a:extLst>
+              <a:ext uri="{28A0092B-C50C-407E-A947-70E740481C1C}">
+                <a14:useLocalDpi xmlns:a14="http://schemas.microsoft.com/office/drawing/2010/main"/>
+              </a:ext>
+            </a:extLst>
+          </a:blip>
           <a:stretch>
             <a:fillRect/>
           </a:stretch>
@@ -4302,6 +4447,1277 @@
     <p:extLst>
       <p:ext uri="{BB962C8B-B14F-4D97-AF65-F5344CB8AC3E}">
         <p14:creationId xmlns:p14="http://schemas.microsoft.com/office/powerpoint/2010/main" val="2058619068"/>
+      </p:ext>
+    </p:extLst>
+  </p:cSld>
+  <p:clrMapOvr>
+    <a:masterClrMapping/>
+  </p:clrMapOvr>
+</p:sld>
+</file>
+
+<file path=ppt/slides/slide2.xml><?xml version="1.0" encoding="utf-8"?>
+<p:sld xmlns:a="http://schemas.openxmlformats.org/drawingml/2006/main" xmlns:r="http://schemas.openxmlformats.org/officeDocument/2006/relationships" xmlns:p="http://schemas.openxmlformats.org/presentationml/2006/main">
+  <p:cSld>
+    <p:spTree>
+      <p:nvGrpSpPr>
+        <p:cNvPr id="1" name="">
+          <a:extLst>
+            <a:ext uri="{FF2B5EF4-FFF2-40B4-BE49-F238E27FC236}">
+              <a16:creationId xmlns:a16="http://schemas.microsoft.com/office/drawing/2014/main" id="{CA80809D-1B09-8242-592D-24742DD77ACA}"/>
+            </a:ext>
+          </a:extLst>
+        </p:cNvPr>
+        <p:cNvGrpSpPr/>
+        <p:nvPr/>
+      </p:nvGrpSpPr>
+      <p:grpSpPr>
+        <a:xfrm>
+          <a:off x="0" y="0"/>
+          <a:ext cx="0" cy="0"/>
+          <a:chOff x="0" y="0"/>
+          <a:chExt cx="0" cy="0"/>
+        </a:xfrm>
+      </p:grpSpPr>
+      <p:sp>
+        <p:nvSpPr>
+          <p:cNvPr id="2" name="TextBox 1">
+            <a:extLst>
+              <a:ext uri="{FF2B5EF4-FFF2-40B4-BE49-F238E27FC236}">
+                <a16:creationId xmlns:a16="http://schemas.microsoft.com/office/drawing/2014/main" id="{ADFE95FF-0821-2718-3793-905BE80019BF}"/>
+              </a:ext>
+            </a:extLst>
+          </p:cNvPr>
+          <p:cNvSpPr txBox="1"/>
+          <p:nvPr/>
+        </p:nvSpPr>
+        <p:spPr>
+          <a:xfrm>
+            <a:off x="0" y="9719"/>
+            <a:ext cx="3493972" cy="400110"/>
+          </a:xfrm>
+          <a:prstGeom prst="rect">
+            <a:avLst/>
+          </a:prstGeom>
+          <a:noFill/>
+        </p:spPr>
+        <p:txBody>
+          <a:bodyPr wrap="square" rtlCol="0">
+            <a:spAutoFit/>
+          </a:bodyPr>
+          <a:lstStyle/>
+          <a:p>
+            <a:r>
+              <a:rPr lang="en-US" sz="2000" b="1" i="0" dirty="0">
+                <a:solidFill>
+                  <a:srgbClr val="0F1111"/>
+                </a:solidFill>
+                <a:effectLst/>
+                <a:latin typeface="Calibri" panose="020F0502020204030204" pitchFamily="34" charset="0"/>
+                <a:cs typeface="Calibri" panose="020F0502020204030204" pitchFamily="34" charset="0"/>
+              </a:rPr>
+              <a:t>Delta Monitor </a:t>
+            </a:r>
+            <a:r>
+              <a:rPr lang="en-US" sz="2000" b="1" i="0" dirty="0">
+                <a:solidFill>
+                  <a:srgbClr val="131313"/>
+                </a:solidFill>
+                <a:effectLst/>
+                <a:latin typeface="Calibri" panose="020F0502020204030204" pitchFamily="34" charset="0"/>
+                <a:cs typeface="Calibri" panose="020F0502020204030204" pitchFamily="34" charset="0"/>
+              </a:rPr>
+              <a:t>shower faucet</a:t>
+            </a:r>
+            <a:r>
+              <a:rPr lang="en-US" sz="2000" b="1" i="0" dirty="0">
+                <a:solidFill>
+                  <a:srgbClr val="0F1111"/>
+                </a:solidFill>
+                <a:effectLst/>
+                <a:latin typeface="Calibri" panose="020F0502020204030204" pitchFamily="34" charset="0"/>
+                <a:cs typeface="Calibri" panose="020F0502020204030204" pitchFamily="34" charset="0"/>
+              </a:rPr>
+              <a:t> </a:t>
+            </a:r>
+            <a:endParaRPr lang="en-US" sz="2000" b="1" dirty="0">
+              <a:solidFill>
+                <a:srgbClr val="00B0F0"/>
+              </a:solidFill>
+              <a:latin typeface="Calibri" panose="020F0502020204030204" pitchFamily="34" charset="0"/>
+              <a:cs typeface="Calibri" panose="020F0502020204030204" pitchFamily="34" charset="0"/>
+            </a:endParaRPr>
+          </a:p>
+        </p:txBody>
+      </p:sp>
+      <p:sp>
+        <p:nvSpPr>
+          <p:cNvPr id="4" name="TextBox 3">
+            <a:extLst>
+              <a:ext uri="{FF2B5EF4-FFF2-40B4-BE49-F238E27FC236}">
+                <a16:creationId xmlns:a16="http://schemas.microsoft.com/office/drawing/2014/main" id="{B57A79DF-66E7-4FBC-D5AB-2179CDE7AC77}"/>
+              </a:ext>
+            </a:extLst>
+          </p:cNvPr>
+          <p:cNvSpPr txBox="1"/>
+          <p:nvPr/>
+        </p:nvSpPr>
+        <p:spPr>
+          <a:xfrm>
+            <a:off x="46839" y="479179"/>
+            <a:ext cx="5019324" cy="6340197"/>
+          </a:xfrm>
+          <a:prstGeom prst="rect">
+            <a:avLst/>
+          </a:prstGeom>
+          <a:noFill/>
+        </p:spPr>
+        <p:txBody>
+          <a:bodyPr wrap="square" rtlCol="0">
+            <a:spAutoFit/>
+          </a:bodyPr>
+          <a:lstStyle/>
+          <a:p>
+            <a:r>
+              <a:rPr lang="en-US" sz="1400" b="0" i="0" dirty="0">
+                <a:solidFill>
+                  <a:srgbClr val="131313"/>
+                </a:solidFill>
+                <a:effectLst/>
+                <a:latin typeface="Calibri" panose="020F0502020204030204" pitchFamily="34" charset="0"/>
+                <a:cs typeface="Calibri" panose="020F0502020204030204" pitchFamily="34" charset="0"/>
+              </a:rPr>
+              <a:t>Delta Monitor 1700 series shower faucet </a:t>
+            </a:r>
+          </a:p>
+          <a:p>
+            <a:r>
+              <a:rPr lang="en-US" sz="1400" dirty="0">
+                <a:solidFill>
+                  <a:srgbClr val="131313"/>
+                </a:solidFill>
+                <a:latin typeface="Calibri" panose="020F0502020204030204" pitchFamily="34" charset="0"/>
+                <a:cs typeface="Calibri" panose="020F0502020204030204" pitchFamily="34" charset="0"/>
+              </a:rPr>
+              <a:t>with RP46463 cartridge.</a:t>
+            </a:r>
+          </a:p>
+          <a:p>
+            <a:endParaRPr lang="en-US" sz="1400" b="0" i="0" dirty="0">
+              <a:solidFill>
+                <a:srgbClr val="131313"/>
+              </a:solidFill>
+              <a:effectLst/>
+              <a:latin typeface="Calibri" panose="020F0502020204030204" pitchFamily="34" charset="0"/>
+              <a:cs typeface="Calibri" panose="020F0502020204030204" pitchFamily="34" charset="0"/>
+            </a:endParaRPr>
+          </a:p>
+          <a:p>
+            <a:r>
+              <a:rPr lang="en-US" sz="1400" b="0" i="0" dirty="0">
+                <a:solidFill>
+                  <a:srgbClr val="131313"/>
+                </a:solidFill>
+                <a:effectLst/>
+                <a:latin typeface="Calibri" panose="020F0502020204030204" pitchFamily="34" charset="0"/>
+                <a:cs typeface="Calibri" panose="020F0502020204030204" pitchFamily="34" charset="0"/>
+              </a:rPr>
+              <a:t>Delta faucets have lifetime warranty. </a:t>
+            </a:r>
+          </a:p>
+          <a:p>
+            <a:r>
+              <a:rPr lang="en-US" sz="1400" b="0" i="0" dirty="0">
+                <a:solidFill>
+                  <a:srgbClr val="131313"/>
+                </a:solidFill>
+                <a:effectLst/>
+                <a:latin typeface="Calibri" panose="020F0502020204030204" pitchFamily="34" charset="0"/>
+                <a:cs typeface="Calibri" panose="020F0502020204030204" pitchFamily="34" charset="0"/>
+              </a:rPr>
+              <a:t>Just contact Delta at the email </a:t>
+            </a:r>
+          </a:p>
+          <a:p>
+            <a:r>
+              <a:rPr lang="en-US" sz="1400" dirty="0">
+                <a:solidFill>
+                  <a:srgbClr val="131313"/>
+                </a:solidFill>
+                <a:latin typeface="Calibri" panose="020F0502020204030204" pitchFamily="34" charset="0"/>
+                <a:cs typeface="Calibri" panose="020F0502020204030204" pitchFamily="34" charset="0"/>
+              </a:rPr>
+              <a:t>     </a:t>
+            </a:r>
+            <a:r>
+              <a:rPr lang="en-US" sz="1400" b="0" i="0" dirty="0" err="1">
+                <a:solidFill>
+                  <a:srgbClr val="131313"/>
+                </a:solidFill>
+                <a:effectLst/>
+                <a:latin typeface="Calibri" panose="020F0502020204030204" pitchFamily="34" charset="0"/>
+                <a:cs typeface="Calibri" panose="020F0502020204030204" pitchFamily="34" charset="0"/>
+              </a:rPr>
+              <a:t>customerservice@deltafaucet.com</a:t>
+            </a:r>
+            <a:endParaRPr lang="en-US" sz="1400" b="0" i="0" dirty="0">
+              <a:solidFill>
+                <a:srgbClr val="131313"/>
+              </a:solidFill>
+              <a:effectLst/>
+              <a:latin typeface="Calibri" panose="020F0502020204030204" pitchFamily="34" charset="0"/>
+              <a:cs typeface="Calibri" panose="020F0502020204030204" pitchFamily="34" charset="0"/>
+            </a:endParaRPr>
+          </a:p>
+          <a:p>
+            <a:r>
+              <a:rPr lang="en-US" sz="1400" dirty="0">
+                <a:solidFill>
+                  <a:srgbClr val="131313"/>
+                </a:solidFill>
+                <a:latin typeface="Calibri" panose="020F0502020204030204" pitchFamily="34" charset="0"/>
+                <a:cs typeface="Calibri" panose="020F0502020204030204" pitchFamily="34" charset="0"/>
+              </a:rPr>
+              <a:t>Send them the picture of the faucet.</a:t>
+            </a:r>
+          </a:p>
+          <a:p>
+            <a:r>
+              <a:rPr lang="en-US" sz="1400" b="0" i="0" dirty="0">
+                <a:solidFill>
+                  <a:srgbClr val="131313"/>
+                </a:solidFill>
+                <a:effectLst/>
+                <a:latin typeface="Calibri" panose="020F0502020204030204" pitchFamily="34" charset="0"/>
+                <a:cs typeface="Calibri" panose="020F0502020204030204" pitchFamily="34" charset="0"/>
+              </a:rPr>
+              <a:t>They will send the repair parts FREE!!</a:t>
+            </a:r>
+          </a:p>
+          <a:p>
+            <a:endParaRPr lang="en-US" sz="1400" dirty="0">
+              <a:latin typeface="Calibri" panose="020F0502020204030204" pitchFamily="34" charset="0"/>
+              <a:cs typeface="Calibri" panose="020F0502020204030204" pitchFamily="34" charset="0"/>
+            </a:endParaRPr>
+          </a:p>
+          <a:p>
+            <a:r>
+              <a:rPr lang="en-US" sz="1400" b="0" i="0" dirty="0">
+                <a:solidFill>
+                  <a:srgbClr val="131313"/>
+                </a:solidFill>
+                <a:effectLst/>
+                <a:latin typeface="Calibri" panose="020F0502020204030204" pitchFamily="34" charset="0"/>
+                <a:cs typeface="Calibri" panose="020F0502020204030204" pitchFamily="34" charset="0"/>
+              </a:rPr>
+              <a:t>RP28603 seal kit sent to me directly from Delta.</a:t>
+            </a:r>
+          </a:p>
+          <a:p>
+            <a:r>
+              <a:rPr lang="en-US" sz="1400" dirty="0">
+                <a:latin typeface="Calibri" panose="020F0502020204030204" pitchFamily="34" charset="0"/>
+                <a:cs typeface="Calibri" panose="020F0502020204030204" pitchFamily="34" charset="0"/>
+                <a:hlinkClick r:id="rId3"/>
+              </a:rPr>
+              <a:t>https://</a:t>
+            </a:r>
+            <a:r>
+              <a:rPr lang="en-US" sz="1400" dirty="0" err="1">
+                <a:latin typeface="Calibri" panose="020F0502020204030204" pitchFamily="34" charset="0"/>
+                <a:cs typeface="Calibri" panose="020F0502020204030204" pitchFamily="34" charset="0"/>
+                <a:hlinkClick r:id="rId3"/>
+              </a:rPr>
+              <a:t>www.youtube.com</a:t>
+            </a:r>
+            <a:r>
+              <a:rPr lang="en-US" sz="1400" dirty="0">
+                <a:latin typeface="Calibri" panose="020F0502020204030204" pitchFamily="34" charset="0"/>
+                <a:cs typeface="Calibri" panose="020F0502020204030204" pitchFamily="34" charset="0"/>
+                <a:hlinkClick r:id="rId3"/>
+              </a:rPr>
+              <a:t>/</a:t>
+            </a:r>
+            <a:r>
+              <a:rPr lang="en-US" sz="1400" dirty="0" err="1">
+                <a:latin typeface="Calibri" panose="020F0502020204030204" pitchFamily="34" charset="0"/>
+                <a:cs typeface="Calibri" panose="020F0502020204030204" pitchFamily="34" charset="0"/>
+                <a:hlinkClick r:id="rId3"/>
+              </a:rPr>
+              <a:t>watch?v</a:t>
+            </a:r>
+            <a:r>
+              <a:rPr lang="en-US" sz="1400" dirty="0">
+                <a:latin typeface="Calibri" panose="020F0502020204030204" pitchFamily="34" charset="0"/>
+                <a:cs typeface="Calibri" panose="020F0502020204030204" pitchFamily="34" charset="0"/>
+                <a:hlinkClick r:id="rId3"/>
+              </a:rPr>
+              <a:t>=PrzEz4_SJL8</a:t>
+            </a:r>
+            <a:endParaRPr lang="en-US" sz="1400" dirty="0">
+              <a:latin typeface="Calibri" panose="020F0502020204030204" pitchFamily="34" charset="0"/>
+              <a:cs typeface="Calibri" panose="020F0502020204030204" pitchFamily="34" charset="0"/>
+            </a:endParaRPr>
+          </a:p>
+          <a:p>
+            <a:endParaRPr lang="en-US" sz="1400" dirty="0">
+              <a:latin typeface="Calibri" panose="020F0502020204030204" pitchFamily="34" charset="0"/>
+              <a:cs typeface="Calibri" panose="020F0502020204030204" pitchFamily="34" charset="0"/>
+            </a:endParaRPr>
+          </a:p>
+          <a:p>
+            <a:r>
+              <a:rPr lang="en-US" sz="1400" dirty="0">
+                <a:latin typeface="Calibri" panose="020F0502020204030204" pitchFamily="34" charset="0"/>
+                <a:cs typeface="Calibri" panose="020F0502020204030204" pitchFamily="34" charset="0"/>
+              </a:rPr>
+              <a:t>Search </a:t>
+            </a:r>
+            <a:r>
+              <a:rPr lang="en-US" sz="1400" dirty="0" err="1">
+                <a:latin typeface="Calibri" panose="020F0502020204030204" pitchFamily="34" charset="0"/>
+                <a:cs typeface="Calibri" panose="020F0502020204030204" pitchFamily="34" charset="0"/>
+              </a:rPr>
+              <a:t>youtube</a:t>
+            </a:r>
+            <a:r>
+              <a:rPr lang="en-US" sz="1400" dirty="0">
+                <a:latin typeface="Calibri" panose="020F0502020204030204" pitchFamily="34" charset="0"/>
+                <a:cs typeface="Calibri" panose="020F0502020204030204" pitchFamily="34" charset="0"/>
+              </a:rPr>
+              <a:t> for "</a:t>
+            </a:r>
+            <a:r>
+              <a:rPr lang="en-US" sz="1400" dirty="0">
+                <a:solidFill>
+                  <a:srgbClr val="131313"/>
+                </a:solidFill>
+                <a:latin typeface="Calibri" panose="020F0502020204030204" pitchFamily="34" charset="0"/>
+                <a:cs typeface="Calibri" panose="020F0502020204030204" pitchFamily="34" charset="0"/>
+              </a:rPr>
+              <a:t>RP46463" to find videos explaining</a:t>
+            </a:r>
+          </a:p>
+          <a:p>
+            <a:r>
+              <a:rPr lang="en-US" sz="1400" dirty="0">
+                <a:solidFill>
+                  <a:srgbClr val="131313"/>
+                </a:solidFill>
+                <a:latin typeface="Calibri" panose="020F0502020204030204" pitchFamily="34" charset="0"/>
+                <a:cs typeface="Calibri" panose="020F0502020204030204" pitchFamily="34" charset="0"/>
+              </a:rPr>
+              <a:t>how to replace, for example:</a:t>
+            </a:r>
+            <a:endParaRPr lang="en-US" sz="1400" dirty="0">
+              <a:latin typeface="Calibri" panose="020F0502020204030204" pitchFamily="34" charset="0"/>
+              <a:cs typeface="Calibri" panose="020F0502020204030204" pitchFamily="34" charset="0"/>
+            </a:endParaRPr>
+          </a:p>
+          <a:p>
+            <a:r>
+              <a:rPr lang="en-US" sz="1400" dirty="0">
+                <a:latin typeface="Calibri" panose="020F0502020204030204" pitchFamily="34" charset="0"/>
+                <a:cs typeface="Calibri" panose="020F0502020204030204" pitchFamily="34" charset="0"/>
+                <a:hlinkClick r:id="rId4"/>
+              </a:rPr>
+              <a:t>https://</a:t>
+            </a:r>
+            <a:r>
+              <a:rPr lang="en-US" sz="1400" dirty="0" err="1">
+                <a:latin typeface="Calibri" panose="020F0502020204030204" pitchFamily="34" charset="0"/>
+                <a:cs typeface="Calibri" panose="020F0502020204030204" pitchFamily="34" charset="0"/>
+                <a:hlinkClick r:id="rId4"/>
+              </a:rPr>
+              <a:t>www.youtube.com</a:t>
+            </a:r>
+            <a:r>
+              <a:rPr lang="en-US" sz="1400" dirty="0">
+                <a:latin typeface="Calibri" panose="020F0502020204030204" pitchFamily="34" charset="0"/>
+                <a:cs typeface="Calibri" panose="020F0502020204030204" pitchFamily="34" charset="0"/>
+                <a:hlinkClick r:id="rId4"/>
+              </a:rPr>
+              <a:t>/</a:t>
+            </a:r>
+            <a:r>
+              <a:rPr lang="en-US" sz="1400" dirty="0" err="1">
+                <a:latin typeface="Calibri" panose="020F0502020204030204" pitchFamily="34" charset="0"/>
+                <a:cs typeface="Calibri" panose="020F0502020204030204" pitchFamily="34" charset="0"/>
+                <a:hlinkClick r:id="rId4"/>
+              </a:rPr>
+              <a:t>watch?v</a:t>
+            </a:r>
+            <a:r>
+              <a:rPr lang="en-US" sz="1400" dirty="0">
+                <a:latin typeface="Calibri" panose="020F0502020204030204" pitchFamily="34" charset="0"/>
+                <a:cs typeface="Calibri" panose="020F0502020204030204" pitchFamily="34" charset="0"/>
+                <a:hlinkClick r:id="rId4"/>
+              </a:rPr>
+              <a:t>=nF9jWuetjYA</a:t>
+            </a:r>
+            <a:endParaRPr lang="en-US" sz="1400" dirty="0">
+              <a:latin typeface="Calibri" panose="020F0502020204030204" pitchFamily="34" charset="0"/>
+              <a:cs typeface="Calibri" panose="020F0502020204030204" pitchFamily="34" charset="0"/>
+            </a:endParaRPr>
+          </a:p>
+          <a:p>
+            <a:endParaRPr lang="en-US" sz="1400" dirty="0">
+              <a:latin typeface="Calibri" panose="020F0502020204030204" pitchFamily="34" charset="0"/>
+              <a:cs typeface="Calibri" panose="020F0502020204030204" pitchFamily="34" charset="0"/>
+            </a:endParaRPr>
+          </a:p>
+          <a:p>
+            <a:r>
+              <a:rPr lang="en-US" sz="1400" b="0" i="0" dirty="0">
+                <a:solidFill>
+                  <a:srgbClr val="131313"/>
+                </a:solidFill>
+                <a:effectLst/>
+                <a:latin typeface="Calibri" panose="020F0502020204030204" pitchFamily="34" charset="0"/>
+                <a:cs typeface="Calibri" panose="020F0502020204030204" pitchFamily="34" charset="0"/>
+              </a:rPr>
+              <a:t>Used </a:t>
+            </a:r>
+            <a:r>
+              <a:rPr lang="en-US" sz="1400" dirty="0">
+                <a:solidFill>
+                  <a:srgbClr val="131313"/>
+                </a:solidFill>
+                <a:latin typeface="Calibri" panose="020F0502020204030204" pitchFamily="34" charset="0"/>
+                <a:cs typeface="Calibri" panose="020F0502020204030204" pitchFamily="34" charset="0"/>
+              </a:rPr>
+              <a:t>Delta RP32104 Cartridge Kit (white, for models before 2006)</a:t>
+            </a:r>
+          </a:p>
+          <a:p>
+            <a:r>
+              <a:rPr lang="en-US" sz="1400" dirty="0">
+                <a:latin typeface="Calibri" panose="020F0502020204030204" pitchFamily="34" charset="0"/>
+                <a:cs typeface="Calibri" panose="020F0502020204030204" pitchFamily="34" charset="0"/>
+                <a:hlinkClick r:id="rId5"/>
+              </a:rPr>
+              <a:t>https://</a:t>
+            </a:r>
+            <a:r>
+              <a:rPr lang="en-US" sz="1400" dirty="0" err="1">
+                <a:latin typeface="Calibri" panose="020F0502020204030204" pitchFamily="34" charset="0"/>
+                <a:cs typeface="Calibri" panose="020F0502020204030204" pitchFamily="34" charset="0"/>
+                <a:hlinkClick r:id="rId5"/>
+              </a:rPr>
+              <a:t>www.youtube.com</a:t>
+            </a:r>
+            <a:r>
+              <a:rPr lang="en-US" sz="1400" dirty="0">
+                <a:latin typeface="Calibri" panose="020F0502020204030204" pitchFamily="34" charset="0"/>
+                <a:cs typeface="Calibri" panose="020F0502020204030204" pitchFamily="34" charset="0"/>
+                <a:hlinkClick r:id="rId5"/>
+              </a:rPr>
+              <a:t>/</a:t>
+            </a:r>
+            <a:r>
+              <a:rPr lang="en-US" sz="1400" dirty="0" err="1">
+                <a:latin typeface="Calibri" panose="020F0502020204030204" pitchFamily="34" charset="0"/>
+                <a:cs typeface="Calibri" panose="020F0502020204030204" pitchFamily="34" charset="0"/>
+                <a:hlinkClick r:id="rId5"/>
+              </a:rPr>
+              <a:t>watch?v</a:t>
+            </a:r>
+            <a:r>
+              <a:rPr lang="en-US" sz="1400" dirty="0">
+                <a:latin typeface="Calibri" panose="020F0502020204030204" pitchFamily="34" charset="0"/>
+                <a:cs typeface="Calibri" panose="020F0502020204030204" pitchFamily="34" charset="0"/>
+                <a:hlinkClick r:id="rId5"/>
+              </a:rPr>
+              <a:t>=32SHxO1NNSA</a:t>
+            </a:r>
+            <a:r>
+              <a:rPr lang="en-US" sz="1400" dirty="0">
+                <a:latin typeface="Calibri" panose="020F0502020204030204" pitchFamily="34" charset="0"/>
+                <a:cs typeface="Calibri" panose="020F0502020204030204" pitchFamily="34" charset="0"/>
+              </a:rPr>
+              <a:t> </a:t>
+            </a:r>
+          </a:p>
+          <a:p>
+            <a:endParaRPr lang="en-US" sz="1400" dirty="0">
+              <a:solidFill>
+                <a:srgbClr val="131313"/>
+              </a:solidFill>
+              <a:latin typeface="Calibri" panose="020F0502020204030204" pitchFamily="34" charset="0"/>
+              <a:cs typeface="Calibri" panose="020F0502020204030204" pitchFamily="34" charset="0"/>
+            </a:endParaRPr>
+          </a:p>
+          <a:p>
+            <a:r>
+              <a:rPr lang="en-US" sz="1400" dirty="0">
+                <a:solidFill>
+                  <a:srgbClr val="131313"/>
+                </a:solidFill>
+                <a:latin typeface="Calibri" panose="020F0502020204030204" pitchFamily="34" charset="0"/>
+                <a:cs typeface="Calibri" panose="020F0502020204030204" pitchFamily="34" charset="0"/>
+              </a:rPr>
+              <a:t>STOP!!! Don't damage your DELTA Shower valve!</a:t>
+            </a:r>
+          </a:p>
+          <a:p>
+            <a:r>
+              <a:rPr lang="en-US" sz="1400" dirty="0">
+                <a:solidFill>
+                  <a:srgbClr val="131313"/>
+                </a:solidFill>
+                <a:latin typeface="Calibri" panose="020F0502020204030204" pitchFamily="34" charset="0"/>
+                <a:cs typeface="Calibri" panose="020F0502020204030204" pitchFamily="34" charset="0"/>
+                <a:hlinkClick r:id="rId6"/>
+              </a:rPr>
+              <a:t>https://</a:t>
+            </a:r>
+            <a:r>
+              <a:rPr lang="en-US" sz="1400" dirty="0" err="1">
+                <a:solidFill>
+                  <a:srgbClr val="131313"/>
+                </a:solidFill>
+                <a:latin typeface="Calibri" panose="020F0502020204030204" pitchFamily="34" charset="0"/>
+                <a:cs typeface="Calibri" panose="020F0502020204030204" pitchFamily="34" charset="0"/>
+                <a:hlinkClick r:id="rId6"/>
+              </a:rPr>
+              <a:t>www.youtube.com</a:t>
+            </a:r>
+            <a:r>
+              <a:rPr lang="en-US" sz="1400" dirty="0">
+                <a:solidFill>
+                  <a:srgbClr val="131313"/>
+                </a:solidFill>
+                <a:latin typeface="Calibri" panose="020F0502020204030204" pitchFamily="34" charset="0"/>
+                <a:cs typeface="Calibri" panose="020F0502020204030204" pitchFamily="34" charset="0"/>
+                <a:hlinkClick r:id="rId6"/>
+              </a:rPr>
+              <a:t>/</a:t>
+            </a:r>
+            <a:r>
+              <a:rPr lang="en-US" sz="1400" dirty="0" err="1">
+                <a:solidFill>
+                  <a:srgbClr val="131313"/>
+                </a:solidFill>
+                <a:latin typeface="Calibri" panose="020F0502020204030204" pitchFamily="34" charset="0"/>
+                <a:cs typeface="Calibri" panose="020F0502020204030204" pitchFamily="34" charset="0"/>
+                <a:hlinkClick r:id="rId6"/>
+              </a:rPr>
+              <a:t>watch?v</a:t>
+            </a:r>
+            <a:r>
+              <a:rPr lang="en-US" sz="1400" dirty="0">
+                <a:solidFill>
+                  <a:srgbClr val="131313"/>
+                </a:solidFill>
+                <a:latin typeface="Calibri" panose="020F0502020204030204" pitchFamily="34" charset="0"/>
+                <a:cs typeface="Calibri" panose="020F0502020204030204" pitchFamily="34" charset="0"/>
+                <a:hlinkClick r:id="rId6"/>
+              </a:rPr>
+              <a:t>=</a:t>
+            </a:r>
+            <a:r>
+              <a:rPr lang="en-US" sz="1400" dirty="0" err="1">
+                <a:solidFill>
+                  <a:srgbClr val="131313"/>
+                </a:solidFill>
+                <a:latin typeface="Calibri" panose="020F0502020204030204" pitchFamily="34" charset="0"/>
+                <a:cs typeface="Calibri" panose="020F0502020204030204" pitchFamily="34" charset="0"/>
+                <a:hlinkClick r:id="rId6"/>
+              </a:rPr>
+              <a:t>meRdEynmPVo</a:t>
+            </a:r>
+            <a:endParaRPr lang="en-US" sz="1400" dirty="0">
+              <a:solidFill>
+                <a:srgbClr val="131313"/>
+              </a:solidFill>
+              <a:latin typeface="Calibri" panose="020F0502020204030204" pitchFamily="34" charset="0"/>
+              <a:cs typeface="Calibri" panose="020F0502020204030204" pitchFamily="34" charset="0"/>
+            </a:endParaRPr>
+          </a:p>
+          <a:p>
+            <a:endParaRPr lang="en-US" sz="1400" dirty="0">
+              <a:solidFill>
+                <a:srgbClr val="131313"/>
+              </a:solidFill>
+              <a:latin typeface="Calibri" panose="020F0502020204030204" pitchFamily="34" charset="0"/>
+              <a:cs typeface="Calibri" panose="020F0502020204030204" pitchFamily="34" charset="0"/>
+            </a:endParaRPr>
+          </a:p>
+          <a:p>
+            <a:r>
+              <a:rPr lang="en-US" sz="1400" dirty="0">
+                <a:solidFill>
+                  <a:srgbClr val="131313"/>
+                </a:solidFill>
+                <a:latin typeface="Calibri" panose="020F0502020204030204" pitchFamily="34" charset="0"/>
+                <a:cs typeface="Calibri" panose="020F0502020204030204" pitchFamily="34" charset="0"/>
+              </a:rPr>
+              <a:t>Which delta cartridge do you have how to replace a delta cartridge</a:t>
+            </a:r>
+          </a:p>
+          <a:p>
+            <a:r>
+              <a:rPr lang="en-US" sz="1400" dirty="0">
+                <a:solidFill>
+                  <a:srgbClr val="131313"/>
+                </a:solidFill>
+                <a:latin typeface="Calibri" panose="020F0502020204030204" pitchFamily="34" charset="0"/>
+                <a:cs typeface="Calibri" panose="020F0502020204030204" pitchFamily="34" charset="0"/>
+                <a:hlinkClick r:id="rId7"/>
+              </a:rPr>
+              <a:t>https://</a:t>
+            </a:r>
+            <a:r>
+              <a:rPr lang="en-US" sz="1400" dirty="0" err="1">
+                <a:solidFill>
+                  <a:srgbClr val="131313"/>
+                </a:solidFill>
+                <a:latin typeface="Calibri" panose="020F0502020204030204" pitchFamily="34" charset="0"/>
+                <a:cs typeface="Calibri" panose="020F0502020204030204" pitchFamily="34" charset="0"/>
+                <a:hlinkClick r:id="rId7"/>
+              </a:rPr>
+              <a:t>www.youtube.com</a:t>
+            </a:r>
+            <a:r>
+              <a:rPr lang="en-US" sz="1400" dirty="0">
+                <a:solidFill>
+                  <a:srgbClr val="131313"/>
+                </a:solidFill>
+                <a:latin typeface="Calibri" panose="020F0502020204030204" pitchFamily="34" charset="0"/>
+                <a:cs typeface="Calibri" panose="020F0502020204030204" pitchFamily="34" charset="0"/>
+                <a:hlinkClick r:id="rId7"/>
+              </a:rPr>
+              <a:t>/</a:t>
+            </a:r>
+            <a:r>
+              <a:rPr lang="en-US" sz="1400" dirty="0" err="1">
+                <a:solidFill>
+                  <a:srgbClr val="131313"/>
+                </a:solidFill>
+                <a:latin typeface="Calibri" panose="020F0502020204030204" pitchFamily="34" charset="0"/>
+                <a:cs typeface="Calibri" panose="020F0502020204030204" pitchFamily="34" charset="0"/>
+                <a:hlinkClick r:id="rId7"/>
+              </a:rPr>
+              <a:t>watch?v</a:t>
+            </a:r>
+            <a:r>
+              <a:rPr lang="en-US" sz="1400" dirty="0">
+                <a:solidFill>
+                  <a:srgbClr val="131313"/>
+                </a:solidFill>
+                <a:latin typeface="Calibri" panose="020F0502020204030204" pitchFamily="34" charset="0"/>
+                <a:cs typeface="Calibri" panose="020F0502020204030204" pitchFamily="34" charset="0"/>
+                <a:hlinkClick r:id="rId7"/>
+              </a:rPr>
+              <a:t>=mVLKFwymZL4</a:t>
+            </a:r>
+            <a:endParaRPr lang="en-US" sz="1400" dirty="0">
+              <a:solidFill>
+                <a:srgbClr val="131313"/>
+              </a:solidFill>
+              <a:latin typeface="Calibri" panose="020F0502020204030204" pitchFamily="34" charset="0"/>
+              <a:cs typeface="Calibri" panose="020F0502020204030204" pitchFamily="34" charset="0"/>
+            </a:endParaRPr>
+          </a:p>
+          <a:p>
+            <a:endParaRPr lang="en-US" sz="1400" dirty="0">
+              <a:solidFill>
+                <a:srgbClr val="131313"/>
+              </a:solidFill>
+              <a:latin typeface="Calibri" panose="020F0502020204030204" pitchFamily="34" charset="0"/>
+              <a:cs typeface="Calibri" panose="020F0502020204030204" pitchFamily="34" charset="0"/>
+            </a:endParaRPr>
+          </a:p>
+          <a:p>
+            <a:r>
+              <a:rPr lang="en-US" sz="1400" dirty="0">
+                <a:solidFill>
+                  <a:srgbClr val="131313"/>
+                </a:solidFill>
+                <a:latin typeface="Calibri" panose="020F0502020204030204" pitchFamily="34" charset="0"/>
+                <a:cs typeface="Calibri" panose="020F0502020204030204" pitchFamily="34" charset="0"/>
+              </a:rPr>
+              <a:t>Delta:</a:t>
+            </a:r>
+          </a:p>
+          <a:p>
+            <a:r>
+              <a:rPr lang="en-US" sz="1400" dirty="0">
+                <a:solidFill>
+                  <a:srgbClr val="131313"/>
+                </a:solidFill>
+                <a:latin typeface="Calibri" panose="020F0502020204030204" pitchFamily="34" charset="0"/>
+                <a:cs typeface="Calibri" panose="020F0502020204030204" pitchFamily="34" charset="0"/>
+                <a:hlinkClick r:id="rId8"/>
+              </a:rPr>
+              <a:t>https://</a:t>
+            </a:r>
+            <a:r>
+              <a:rPr lang="en-US" sz="1400" dirty="0" err="1">
+                <a:solidFill>
+                  <a:srgbClr val="131313"/>
+                </a:solidFill>
+                <a:latin typeface="Calibri" panose="020F0502020204030204" pitchFamily="34" charset="0"/>
+                <a:cs typeface="Calibri" panose="020F0502020204030204" pitchFamily="34" charset="0"/>
+                <a:hlinkClick r:id="rId8"/>
+              </a:rPr>
+              <a:t>www.deltafaucet.com</a:t>
+            </a:r>
+            <a:r>
+              <a:rPr lang="en-US" sz="1400" dirty="0">
+                <a:solidFill>
+                  <a:srgbClr val="131313"/>
+                </a:solidFill>
+                <a:latin typeface="Calibri" panose="020F0502020204030204" pitchFamily="34" charset="0"/>
+                <a:cs typeface="Calibri" panose="020F0502020204030204" pitchFamily="34" charset="0"/>
+                <a:hlinkClick r:id="rId8"/>
+              </a:rPr>
+              <a:t>/service-parts/contact-us</a:t>
+            </a:r>
+            <a:endParaRPr lang="en-US" sz="1400" dirty="0">
+              <a:solidFill>
+                <a:srgbClr val="131313"/>
+              </a:solidFill>
+              <a:latin typeface="Calibri" panose="020F0502020204030204" pitchFamily="34" charset="0"/>
+              <a:cs typeface="Calibri" panose="020F0502020204030204" pitchFamily="34" charset="0"/>
+            </a:endParaRPr>
+          </a:p>
+          <a:p>
+            <a:r>
+              <a:rPr lang="en-US" sz="1400" b="0" i="0" dirty="0">
+                <a:solidFill>
+                  <a:srgbClr val="000000"/>
+                </a:solidFill>
+                <a:effectLst/>
+                <a:latin typeface="Calibri" panose="020F0502020204030204" pitchFamily="34" charset="0"/>
+                <a:cs typeface="Calibri" panose="020F0502020204030204" pitchFamily="34" charset="0"/>
+              </a:rPr>
+              <a:t>1-800-345-DELTA (3358)</a:t>
+            </a:r>
+            <a:endParaRPr lang="en-US" sz="1400" b="0" i="0" dirty="0">
+              <a:solidFill>
+                <a:srgbClr val="131313"/>
+              </a:solidFill>
+              <a:effectLst/>
+              <a:latin typeface="Calibri" panose="020F0502020204030204" pitchFamily="34" charset="0"/>
+              <a:cs typeface="Calibri" panose="020F0502020204030204" pitchFamily="34" charset="0"/>
+            </a:endParaRPr>
+          </a:p>
+          <a:p>
+            <a:r>
+              <a:rPr lang="en-US" sz="1400" b="0" i="0" dirty="0">
+                <a:solidFill>
+                  <a:srgbClr val="18191D"/>
+                </a:solidFill>
+                <a:effectLst/>
+                <a:latin typeface="Calibri" panose="020F0502020204030204" pitchFamily="34" charset="0"/>
+                <a:cs typeface="Calibri" panose="020F0502020204030204" pitchFamily="34" charset="0"/>
+              </a:rPr>
+              <a:t>M-F. 8am-6pm EST, Sat 9am-6pm EST</a:t>
+            </a:r>
+          </a:p>
+        </p:txBody>
+      </p:sp>
+      <p:pic>
+        <p:nvPicPr>
+          <p:cNvPr id="5" name="Picture 4">
+            <a:extLst>
+              <a:ext uri="{FF2B5EF4-FFF2-40B4-BE49-F238E27FC236}">
+                <a16:creationId xmlns:a16="http://schemas.microsoft.com/office/drawing/2014/main" id="{82F262B3-1890-FF24-C0E2-898A7BD9AF6E}"/>
+              </a:ext>
+            </a:extLst>
+          </p:cNvPr>
+          <p:cNvPicPr>
+            <a:picLocks noChangeAspect="1"/>
+          </p:cNvPicPr>
+          <p:nvPr/>
+        </p:nvPicPr>
+        <p:blipFill>
+          <a:blip r:embed="rId9" cstate="email">
+            <a:extLst>
+              <a:ext uri="{28A0092B-C50C-407E-A947-70E740481C1C}">
+                <a14:useLocalDpi xmlns:a14="http://schemas.microsoft.com/office/drawing/2010/main"/>
+              </a:ext>
+            </a:extLst>
+          </a:blip>
+          <a:stretch>
+            <a:fillRect/>
+          </a:stretch>
+        </p:blipFill>
+        <p:spPr>
+          <a:xfrm>
+            <a:off x="9520732" y="635238"/>
+            <a:ext cx="2574470" cy="2271591"/>
+          </a:xfrm>
+          <a:prstGeom prst="rect">
+            <a:avLst/>
+          </a:prstGeom>
+        </p:spPr>
+      </p:pic>
+      <p:sp>
+        <p:nvSpPr>
+          <p:cNvPr id="10" name="TextBox 9">
+            <a:extLst>
+              <a:ext uri="{FF2B5EF4-FFF2-40B4-BE49-F238E27FC236}">
+                <a16:creationId xmlns:a16="http://schemas.microsoft.com/office/drawing/2014/main" id="{6FC3645F-45E1-248C-E342-4B75B0A8F112}"/>
+              </a:ext>
+            </a:extLst>
+          </p:cNvPr>
+          <p:cNvSpPr txBox="1"/>
+          <p:nvPr/>
+        </p:nvSpPr>
+        <p:spPr>
+          <a:xfrm>
+            <a:off x="5628378" y="3496684"/>
+            <a:ext cx="3649342" cy="276999"/>
+          </a:xfrm>
+          <a:prstGeom prst="rect">
+            <a:avLst/>
+          </a:prstGeom>
+          <a:noFill/>
+        </p:spPr>
+        <p:txBody>
+          <a:bodyPr wrap="square">
+            <a:spAutoFit/>
+          </a:bodyPr>
+          <a:lstStyle/>
+          <a:p>
+            <a:r>
+              <a:rPr lang="en-US" sz="1200" dirty="0">
+                <a:latin typeface="Calibri" panose="020F0502020204030204" pitchFamily="34" charset="0"/>
+                <a:cs typeface="Calibri" panose="020F0502020204030204" pitchFamily="34" charset="0"/>
+                <a:hlinkClick r:id="rId10"/>
+              </a:rPr>
+              <a:t>https://</a:t>
+            </a:r>
+            <a:r>
+              <a:rPr lang="en-US" sz="1200" dirty="0" err="1">
+                <a:latin typeface="Calibri" panose="020F0502020204030204" pitchFamily="34" charset="0"/>
+                <a:cs typeface="Calibri" panose="020F0502020204030204" pitchFamily="34" charset="0"/>
+                <a:hlinkClick r:id="rId10"/>
+              </a:rPr>
+              <a:t>www.amazon.com</a:t>
+            </a:r>
+            <a:r>
+              <a:rPr lang="en-US" sz="1200" dirty="0">
+                <a:latin typeface="Calibri" panose="020F0502020204030204" pitchFamily="34" charset="0"/>
+                <a:cs typeface="Calibri" panose="020F0502020204030204" pitchFamily="34" charset="0"/>
+                <a:hlinkClick r:id="rId10"/>
+              </a:rPr>
+              <a:t>/</a:t>
+            </a:r>
+            <a:r>
+              <a:rPr lang="en-US" sz="1200" dirty="0" err="1">
+                <a:latin typeface="Calibri" panose="020F0502020204030204" pitchFamily="34" charset="0"/>
+                <a:cs typeface="Calibri" panose="020F0502020204030204" pitchFamily="34" charset="0"/>
+                <a:hlinkClick r:id="rId10"/>
+              </a:rPr>
+              <a:t>dp</a:t>
+            </a:r>
+            <a:r>
+              <a:rPr lang="en-US" sz="1200" dirty="0">
+                <a:latin typeface="Calibri" panose="020F0502020204030204" pitchFamily="34" charset="0"/>
+                <a:cs typeface="Calibri" panose="020F0502020204030204" pitchFamily="34" charset="0"/>
+                <a:hlinkClick r:id="rId10"/>
+              </a:rPr>
+              <a:t>/B07G2TCSKF</a:t>
+            </a:r>
+            <a:endParaRPr lang="en-US" sz="1200" dirty="0">
+              <a:latin typeface="Calibri" panose="020F0502020204030204" pitchFamily="34" charset="0"/>
+              <a:cs typeface="Calibri" panose="020F0502020204030204" pitchFamily="34" charset="0"/>
+            </a:endParaRPr>
+          </a:p>
+        </p:txBody>
+      </p:sp>
+      <p:sp>
+        <p:nvSpPr>
+          <p:cNvPr id="12" name="TextBox 11">
+            <a:extLst>
+              <a:ext uri="{FF2B5EF4-FFF2-40B4-BE49-F238E27FC236}">
+                <a16:creationId xmlns:a16="http://schemas.microsoft.com/office/drawing/2014/main" id="{72F6280A-34CD-5B3D-3021-C896E46A2089}"/>
+              </a:ext>
+            </a:extLst>
+          </p:cNvPr>
+          <p:cNvSpPr txBox="1"/>
+          <p:nvPr/>
+        </p:nvSpPr>
+        <p:spPr>
+          <a:xfrm>
+            <a:off x="9256863" y="6357711"/>
+            <a:ext cx="3032760" cy="461665"/>
+          </a:xfrm>
+          <a:prstGeom prst="rect">
+            <a:avLst/>
+          </a:prstGeom>
+          <a:noFill/>
+        </p:spPr>
+        <p:txBody>
+          <a:bodyPr wrap="square">
+            <a:spAutoFit/>
+          </a:bodyPr>
+          <a:lstStyle/>
+          <a:p>
+            <a:r>
+              <a:rPr lang="en-US" sz="1200" b="0" i="0" dirty="0">
+                <a:solidFill>
+                  <a:srgbClr val="0F1111"/>
+                </a:solidFill>
+                <a:effectLst/>
+                <a:latin typeface="Amazon Ember"/>
+              </a:rPr>
+              <a:t>Delta rp22734 bonnet nut</a:t>
+            </a:r>
+          </a:p>
+          <a:p>
+            <a:r>
+              <a:rPr lang="en-US" sz="1200" b="0" i="0" dirty="0">
+                <a:solidFill>
+                  <a:srgbClr val="0F1111"/>
+                </a:solidFill>
+                <a:effectLst/>
+                <a:latin typeface="Amazon Ember"/>
+                <a:hlinkClick r:id="rId11"/>
+              </a:rPr>
+              <a:t>https://www.amazon.com/</a:t>
+            </a:r>
+            <a:r>
+              <a:rPr lang="en-US" sz="1200" b="0" i="0" dirty="0" err="1">
+                <a:solidFill>
+                  <a:srgbClr val="0F1111"/>
+                </a:solidFill>
+                <a:effectLst/>
+                <a:latin typeface="Amazon Ember"/>
+                <a:hlinkClick r:id="rId11"/>
+              </a:rPr>
+              <a:t>dp</a:t>
+            </a:r>
+            <a:r>
+              <a:rPr lang="en-US" sz="1200" b="0" i="0" dirty="0">
+                <a:solidFill>
+                  <a:srgbClr val="0F1111"/>
+                </a:solidFill>
+                <a:effectLst/>
+                <a:latin typeface="Amazon Ember"/>
+                <a:hlinkClick r:id="rId11"/>
+              </a:rPr>
+              <a:t>/B001DU0GLY</a:t>
+            </a:r>
+            <a:r>
+              <a:rPr lang="en-US" sz="1200" b="0" i="0" dirty="0">
+                <a:solidFill>
+                  <a:srgbClr val="0F1111"/>
+                </a:solidFill>
+                <a:effectLst/>
+                <a:latin typeface="Amazon Ember"/>
+              </a:rPr>
+              <a:t> </a:t>
+            </a:r>
+            <a:endParaRPr lang="en-US" sz="1200" dirty="0"/>
+          </a:p>
+        </p:txBody>
+      </p:sp>
+      <p:pic>
+        <p:nvPicPr>
+          <p:cNvPr id="13" name="Picture 12">
+            <a:extLst>
+              <a:ext uri="{FF2B5EF4-FFF2-40B4-BE49-F238E27FC236}">
+                <a16:creationId xmlns:a16="http://schemas.microsoft.com/office/drawing/2014/main" id="{BBBE2146-3BEC-E235-4CE8-63FE3256C5CF}"/>
+              </a:ext>
+            </a:extLst>
+          </p:cNvPr>
+          <p:cNvPicPr>
+            <a:picLocks noChangeAspect="1"/>
+          </p:cNvPicPr>
+          <p:nvPr/>
+        </p:nvPicPr>
+        <p:blipFill>
+          <a:blip r:embed="rId12" cstate="email">
+            <a:extLst>
+              <a:ext uri="{28A0092B-C50C-407E-A947-70E740481C1C}">
+                <a14:useLocalDpi xmlns:a14="http://schemas.microsoft.com/office/drawing/2010/main"/>
+              </a:ext>
+            </a:extLst>
+          </a:blip>
+          <a:stretch>
+            <a:fillRect/>
+          </a:stretch>
+        </p:blipFill>
+        <p:spPr>
+          <a:xfrm>
+            <a:off x="9725224" y="4717115"/>
+            <a:ext cx="2096038" cy="1586096"/>
+          </a:xfrm>
+          <a:prstGeom prst="rect">
+            <a:avLst/>
+          </a:prstGeom>
+        </p:spPr>
+      </p:pic>
+      <p:pic>
+        <p:nvPicPr>
+          <p:cNvPr id="14" name="Picture 13">
+            <a:extLst>
+              <a:ext uri="{FF2B5EF4-FFF2-40B4-BE49-F238E27FC236}">
+                <a16:creationId xmlns:a16="http://schemas.microsoft.com/office/drawing/2014/main" id="{233E1572-0D68-80C2-9E7E-F8D3AAD14B47}"/>
+              </a:ext>
+            </a:extLst>
+          </p:cNvPr>
+          <p:cNvPicPr>
+            <a:picLocks noChangeAspect="1"/>
+          </p:cNvPicPr>
+          <p:nvPr/>
+        </p:nvPicPr>
+        <p:blipFill>
+          <a:blip r:embed="rId13" cstate="email">
+            <a:extLst>
+              <a:ext uri="{28A0092B-C50C-407E-A947-70E740481C1C}">
+                <a14:useLocalDpi xmlns:a14="http://schemas.microsoft.com/office/drawing/2010/main"/>
+              </a:ext>
+            </a:extLst>
+          </a:blip>
+          <a:stretch>
+            <a:fillRect/>
+          </a:stretch>
+        </p:blipFill>
+        <p:spPr>
+          <a:xfrm>
+            <a:off x="5661943" y="388193"/>
+            <a:ext cx="1438421" cy="3036667"/>
+          </a:xfrm>
+          <a:prstGeom prst="rect">
+            <a:avLst/>
+          </a:prstGeom>
+        </p:spPr>
+      </p:pic>
+      <p:pic>
+        <p:nvPicPr>
+          <p:cNvPr id="16" name="Picture 15">
+            <a:extLst>
+              <a:ext uri="{FF2B5EF4-FFF2-40B4-BE49-F238E27FC236}">
+                <a16:creationId xmlns:a16="http://schemas.microsoft.com/office/drawing/2014/main" id="{E418555C-4030-E152-26E2-CE3B343EA7F3}"/>
+              </a:ext>
+            </a:extLst>
+          </p:cNvPr>
+          <p:cNvPicPr>
+            <a:picLocks noChangeAspect="1"/>
+          </p:cNvPicPr>
+          <p:nvPr/>
+        </p:nvPicPr>
+        <p:blipFill>
+          <a:blip r:embed="rId14" cstate="email">
+            <a:extLst>
+              <a:ext uri="{28A0092B-C50C-407E-A947-70E740481C1C}">
+                <a14:useLocalDpi xmlns:a14="http://schemas.microsoft.com/office/drawing/2010/main"/>
+              </a:ext>
+            </a:extLst>
+          </a:blip>
+          <a:stretch>
+            <a:fillRect/>
+          </a:stretch>
+        </p:blipFill>
+        <p:spPr>
+          <a:xfrm>
+            <a:off x="7720039" y="4172255"/>
+            <a:ext cx="1291148" cy="2017418"/>
+          </a:xfrm>
+          <a:prstGeom prst="rect">
+            <a:avLst/>
+          </a:prstGeom>
+        </p:spPr>
+      </p:pic>
+      <p:sp>
+        <p:nvSpPr>
+          <p:cNvPr id="18" name="TextBox 17">
+            <a:extLst>
+              <a:ext uri="{FF2B5EF4-FFF2-40B4-BE49-F238E27FC236}">
+                <a16:creationId xmlns:a16="http://schemas.microsoft.com/office/drawing/2014/main" id="{215379D1-D3BB-2FFC-3FC0-0C7323EE33AA}"/>
+              </a:ext>
+            </a:extLst>
+          </p:cNvPr>
+          <p:cNvSpPr txBox="1"/>
+          <p:nvPr/>
+        </p:nvSpPr>
+        <p:spPr>
+          <a:xfrm>
+            <a:off x="5661943" y="6198878"/>
+            <a:ext cx="3467501" cy="461665"/>
+          </a:xfrm>
+          <a:prstGeom prst="rect">
+            <a:avLst/>
+          </a:prstGeom>
+          <a:noFill/>
+        </p:spPr>
+        <p:txBody>
+          <a:bodyPr wrap="square">
+            <a:spAutoFit/>
+          </a:bodyPr>
+          <a:lstStyle/>
+          <a:p>
+            <a:r>
+              <a:rPr lang="en-US" sz="1200" dirty="0">
+                <a:latin typeface="Calibri" panose="020F0502020204030204" pitchFamily="34" charset="0"/>
+                <a:cs typeface="Calibri" panose="020F0502020204030204" pitchFamily="34" charset="0"/>
+                <a:hlinkClick r:id="rId15"/>
+              </a:rPr>
+              <a:t>https://www.youtube.com/watch?v=qD6j2vWpP4A</a:t>
+            </a:r>
+            <a:r>
+              <a:rPr lang="en-US" sz="1200" dirty="0">
+                <a:latin typeface="Calibri" panose="020F0502020204030204" pitchFamily="34" charset="0"/>
+                <a:cs typeface="Calibri" panose="020F0502020204030204" pitchFamily="34" charset="0"/>
+              </a:rPr>
+              <a:t> </a:t>
+            </a:r>
+          </a:p>
+          <a:p>
+            <a:r>
+              <a:rPr lang="en-US" sz="1200" dirty="0">
+                <a:latin typeface="Calibri" panose="020F0502020204030204" pitchFamily="34" charset="0"/>
+                <a:cs typeface="Calibri" panose="020F0502020204030204" pitchFamily="34" charset="0"/>
+                <a:hlinkClick r:id="rId16"/>
+              </a:rPr>
+              <a:t>https://</a:t>
+            </a:r>
+            <a:r>
+              <a:rPr lang="en-US" sz="1200" dirty="0" err="1">
+                <a:latin typeface="Calibri" panose="020F0502020204030204" pitchFamily="34" charset="0"/>
+                <a:cs typeface="Calibri" panose="020F0502020204030204" pitchFamily="34" charset="0"/>
+                <a:hlinkClick r:id="rId16"/>
+              </a:rPr>
+              <a:t>www.youtube.com</a:t>
+            </a:r>
+            <a:r>
+              <a:rPr lang="en-US" sz="1200" dirty="0">
+                <a:latin typeface="Calibri" panose="020F0502020204030204" pitchFamily="34" charset="0"/>
+                <a:cs typeface="Calibri" panose="020F0502020204030204" pitchFamily="34" charset="0"/>
+                <a:hlinkClick r:id="rId16"/>
+              </a:rPr>
+              <a:t>/shorts/sH63hY-eUzg</a:t>
+            </a:r>
+            <a:endParaRPr lang="en-US" sz="1200" dirty="0">
+              <a:latin typeface="Calibri" panose="020F0502020204030204" pitchFamily="34" charset="0"/>
+              <a:cs typeface="Calibri" panose="020F0502020204030204" pitchFamily="34" charset="0"/>
+            </a:endParaRPr>
+          </a:p>
+        </p:txBody>
+      </p:sp>
+      <p:pic>
+        <p:nvPicPr>
+          <p:cNvPr id="19" name="Picture 18">
+            <a:extLst>
+              <a:ext uri="{FF2B5EF4-FFF2-40B4-BE49-F238E27FC236}">
+                <a16:creationId xmlns:a16="http://schemas.microsoft.com/office/drawing/2014/main" id="{FED9F91B-3123-E8EF-05CA-F0018DA3945E}"/>
+              </a:ext>
+            </a:extLst>
+          </p:cNvPr>
+          <p:cNvPicPr>
+            <a:picLocks noChangeAspect="1"/>
+          </p:cNvPicPr>
+          <p:nvPr/>
+        </p:nvPicPr>
+        <p:blipFill>
+          <a:blip r:embed="rId17" cstate="email">
+            <a:extLst>
+              <a:ext uri="{28A0092B-C50C-407E-A947-70E740481C1C}">
+                <a14:useLocalDpi xmlns:a14="http://schemas.microsoft.com/office/drawing/2010/main"/>
+              </a:ext>
+            </a:extLst>
+          </a:blip>
+          <a:stretch>
+            <a:fillRect/>
+          </a:stretch>
+        </p:blipFill>
+        <p:spPr>
+          <a:xfrm>
+            <a:off x="5534525" y="4307672"/>
+            <a:ext cx="2035552" cy="1586096"/>
+          </a:xfrm>
+          <a:prstGeom prst="rect">
+            <a:avLst/>
+          </a:prstGeom>
+        </p:spPr>
+      </p:pic>
+      <p:pic>
+        <p:nvPicPr>
+          <p:cNvPr id="20" name="Picture 19">
+            <a:extLst>
+              <a:ext uri="{FF2B5EF4-FFF2-40B4-BE49-F238E27FC236}">
+                <a16:creationId xmlns:a16="http://schemas.microsoft.com/office/drawing/2014/main" id="{1C491B69-E2A2-9702-FA73-44C0DC6F3C59}"/>
+              </a:ext>
+            </a:extLst>
+          </p:cNvPr>
+          <p:cNvPicPr>
+            <a:picLocks noChangeAspect="1"/>
+          </p:cNvPicPr>
+          <p:nvPr/>
+        </p:nvPicPr>
+        <p:blipFill>
+          <a:blip r:embed="rId18" cstate="email">
+            <a:extLst>
+              <a:ext uri="{28A0092B-C50C-407E-A947-70E740481C1C}">
+                <a14:useLocalDpi xmlns:a14="http://schemas.microsoft.com/office/drawing/2010/main"/>
+              </a:ext>
+            </a:extLst>
+          </a:blip>
+          <a:stretch>
+            <a:fillRect/>
+          </a:stretch>
+        </p:blipFill>
+        <p:spPr>
+          <a:xfrm>
+            <a:off x="7174921" y="635238"/>
+            <a:ext cx="2249355" cy="2611409"/>
+          </a:xfrm>
+          <a:prstGeom prst="rect">
+            <a:avLst/>
+          </a:prstGeom>
+        </p:spPr>
+      </p:pic>
+      <p:sp>
+        <p:nvSpPr>
+          <p:cNvPr id="6" name="TextBox 5">
+            <a:extLst>
+              <a:ext uri="{FF2B5EF4-FFF2-40B4-BE49-F238E27FC236}">
+                <a16:creationId xmlns:a16="http://schemas.microsoft.com/office/drawing/2014/main" id="{FD24696C-6E30-F435-2F82-C091A18CD0A3}"/>
+              </a:ext>
+            </a:extLst>
+          </p:cNvPr>
+          <p:cNvSpPr txBox="1"/>
+          <p:nvPr/>
+        </p:nvSpPr>
+        <p:spPr>
+          <a:xfrm>
+            <a:off x="5611525" y="38023"/>
+            <a:ext cx="1565839" cy="307777"/>
+          </a:xfrm>
+          <a:prstGeom prst="rect">
+            <a:avLst/>
+          </a:prstGeom>
+          <a:noFill/>
+        </p:spPr>
+        <p:txBody>
+          <a:bodyPr wrap="square">
+            <a:spAutoFit/>
+          </a:bodyPr>
+          <a:lstStyle/>
+          <a:p>
+            <a:r>
+              <a:rPr lang="en-US" sz="1400" dirty="0">
+                <a:solidFill>
+                  <a:srgbClr val="131313"/>
+                </a:solidFill>
+                <a:latin typeface="Calibri" panose="020F0502020204030204" pitchFamily="34" charset="0"/>
+                <a:cs typeface="Calibri" panose="020F0502020204030204" pitchFamily="34" charset="0"/>
+              </a:rPr>
+              <a:t>RP46463 cartridge</a:t>
+            </a:r>
+            <a:endParaRPr lang="en-US" sz="1400" dirty="0"/>
+          </a:p>
+        </p:txBody>
+      </p:sp>
+    </p:spTree>
+    <p:extLst>
+      <p:ext uri="{BB962C8B-B14F-4D97-AF65-F5344CB8AC3E}">
+        <p14:creationId xmlns:p14="http://schemas.microsoft.com/office/powerpoint/2010/main" val="4062696701"/>
       </p:ext>
     </p:extLst>
   </p:cSld>

--- a/faucets.pptx
+++ b/faucets.pptx
@@ -5,11 +5,12 @@
     <p:sldMasterId id="2147483648" r:id="rId1"/>
   </p:sldMasterIdLst>
   <p:notesMasterIdLst>
-    <p:notesMasterId r:id="rId4"/>
+    <p:notesMasterId r:id="rId5"/>
   </p:notesMasterIdLst>
   <p:sldIdLst>
     <p:sldId id="261" r:id="rId2"/>
     <p:sldId id="262" r:id="rId3"/>
+    <p:sldId id="263" r:id="rId4"/>
   </p:sldIdLst>
   <p:sldSz cx="12192000" cy="6858000"/>
   <p:notesSz cx="6858000" cy="9144000"/>
@@ -198,7 +199,7 @@
           <a:p>
             <a:fld id="{D2843BDE-B8C0-934E-9704-CBA3B88C1FB8}" type="datetimeFigureOut">
               <a:rPr lang="en-US" smtClean="0"/>
-              <a:t>10/19/24</a:t>
+              <a:t>5/10/26</a:t>
             </a:fld>
             <a:endParaRPr lang="en-US"/>
           </a:p>
@@ -657,6 +658,114 @@
 </p:notes>
 </file>
 
+<file path=ppt/notesSlides/notesSlide3.xml><?xml version="1.0" encoding="utf-8"?>
+<p:notes xmlns:a="http://schemas.openxmlformats.org/drawingml/2006/main" xmlns:r="http://schemas.openxmlformats.org/officeDocument/2006/relationships" xmlns:p="http://schemas.openxmlformats.org/presentationml/2006/main">
+  <p:cSld>
+    <p:spTree>
+      <p:nvGrpSpPr>
+        <p:cNvPr id="1" name="">
+          <a:extLst>
+            <a:ext uri="{FF2B5EF4-FFF2-40B4-BE49-F238E27FC236}">
+              <a16:creationId xmlns:a16="http://schemas.microsoft.com/office/drawing/2014/main" id="{7FA47F6B-AB2B-AEBE-771D-CE8528D86459}"/>
+            </a:ext>
+          </a:extLst>
+        </p:cNvPr>
+        <p:cNvGrpSpPr/>
+        <p:nvPr/>
+      </p:nvGrpSpPr>
+      <p:grpSpPr>
+        <a:xfrm>
+          <a:off x="0" y="0"/>
+          <a:ext cx="0" cy="0"/>
+          <a:chOff x="0" y="0"/>
+          <a:chExt cx="0" cy="0"/>
+        </a:xfrm>
+      </p:grpSpPr>
+      <p:sp>
+        <p:nvSpPr>
+          <p:cNvPr id="2" name="Slide Image Placeholder 1">
+            <a:extLst>
+              <a:ext uri="{FF2B5EF4-FFF2-40B4-BE49-F238E27FC236}">
+                <a16:creationId xmlns:a16="http://schemas.microsoft.com/office/drawing/2014/main" id="{CF9E0912-5BBA-6C2C-745A-A784E53759CA}"/>
+              </a:ext>
+            </a:extLst>
+          </p:cNvPr>
+          <p:cNvSpPr>
+            <a:spLocks noGrp="1" noRot="1" noChangeAspect="1"/>
+          </p:cNvSpPr>
+          <p:nvPr>
+            <p:ph type="sldImg"/>
+          </p:nvPr>
+        </p:nvSpPr>
+        <p:spPr/>
+      </p:sp>
+      <p:sp>
+        <p:nvSpPr>
+          <p:cNvPr id="3" name="Notes Placeholder 2">
+            <a:extLst>
+              <a:ext uri="{FF2B5EF4-FFF2-40B4-BE49-F238E27FC236}">
+                <a16:creationId xmlns:a16="http://schemas.microsoft.com/office/drawing/2014/main" id="{126F4150-082E-79C4-1F3A-2BD8324AD49A}"/>
+              </a:ext>
+            </a:extLst>
+          </p:cNvPr>
+          <p:cNvSpPr>
+            <a:spLocks noGrp="1"/>
+          </p:cNvSpPr>
+          <p:nvPr>
+            <p:ph type="body" idx="1"/>
+          </p:nvPr>
+        </p:nvSpPr>
+        <p:spPr/>
+        <p:txBody>
+          <a:bodyPr/>
+          <a:lstStyle/>
+          <a:p>
+            <a:endParaRPr lang="en-US" dirty="0"/>
+          </a:p>
+        </p:txBody>
+      </p:sp>
+      <p:sp>
+        <p:nvSpPr>
+          <p:cNvPr id="4" name="Slide Number Placeholder 3">
+            <a:extLst>
+              <a:ext uri="{FF2B5EF4-FFF2-40B4-BE49-F238E27FC236}">
+                <a16:creationId xmlns:a16="http://schemas.microsoft.com/office/drawing/2014/main" id="{C7854A81-3A6D-D606-BC83-946B2A91A259}"/>
+              </a:ext>
+            </a:extLst>
+          </p:cNvPr>
+          <p:cNvSpPr>
+            <a:spLocks noGrp="1"/>
+          </p:cNvSpPr>
+          <p:nvPr>
+            <p:ph type="sldNum" sz="quarter" idx="5"/>
+          </p:nvPr>
+        </p:nvSpPr>
+        <p:spPr/>
+        <p:txBody>
+          <a:bodyPr/>
+          <a:lstStyle/>
+          <a:p>
+            <a:fld id="{BA8B91EE-EA77-074C-ABDE-BAE6359B4E98}" type="slidenum">
+              <a:rPr lang="en-US" smtClean="0"/>
+              <a:t>3</a:t>
+            </a:fld>
+            <a:endParaRPr lang="en-US"/>
+          </a:p>
+        </p:txBody>
+      </p:sp>
+    </p:spTree>
+    <p:extLst>
+      <p:ext uri="{BB962C8B-B14F-4D97-AF65-F5344CB8AC3E}">
+        <p14:creationId xmlns:p14="http://schemas.microsoft.com/office/powerpoint/2010/main" val="669859266"/>
+      </p:ext>
+    </p:extLst>
+  </p:cSld>
+  <p:clrMapOvr>
+    <a:masterClrMapping/>
+  </p:clrMapOvr>
+</p:notes>
+</file>
+
 <file path=ppt/slideLayouts/slideLayout1.xml><?xml version="1.0" encoding="utf-8"?>
 <p:sldLayout xmlns:a="http://schemas.openxmlformats.org/drawingml/2006/main" xmlns:r="http://schemas.openxmlformats.org/officeDocument/2006/relationships" xmlns:p="http://schemas.openxmlformats.org/presentationml/2006/main" type="title" preserve="1">
   <p:cSld name="Title Slide">
@@ -803,7 +912,7 @@
           <a:lstStyle/>
           <a:p>
             <a:fld id="{5F491023-0B0A-7041-9F06-D25A50EF063B}" type="datetimeFigureOut">
-              <a:t>10/19/24</a:t>
+              <a:t>5/10/26</a:t>
             </a:fld>
             <a:endParaRPr lang="en-US"/>
           </a:p>
@@ -999,7 +1108,7 @@
           <a:lstStyle/>
           <a:p>
             <a:fld id="{5F491023-0B0A-7041-9F06-D25A50EF063B}" type="datetimeFigureOut">
-              <a:t>10/19/24</a:t>
+              <a:t>5/10/26</a:t>
             </a:fld>
             <a:endParaRPr lang="en-US"/>
           </a:p>
@@ -1205,7 +1314,7 @@
           <a:lstStyle/>
           <a:p>
             <a:fld id="{5F491023-0B0A-7041-9F06-D25A50EF063B}" type="datetimeFigureOut">
-              <a:t>10/19/24</a:t>
+              <a:t>5/10/26</a:t>
             </a:fld>
             <a:endParaRPr lang="en-US"/>
           </a:p>
@@ -1401,7 +1510,7 @@
           <a:lstStyle/>
           <a:p>
             <a:fld id="{5F491023-0B0A-7041-9F06-D25A50EF063B}" type="datetimeFigureOut">
-              <a:t>10/19/24</a:t>
+              <a:t>5/10/26</a:t>
             </a:fld>
             <a:endParaRPr lang="en-US"/>
           </a:p>
@@ -1674,7 +1783,7 @@
           <a:lstStyle/>
           <a:p>
             <a:fld id="{5F491023-0B0A-7041-9F06-D25A50EF063B}" type="datetimeFigureOut">
-              <a:t>10/19/24</a:t>
+              <a:t>5/10/26</a:t>
             </a:fld>
             <a:endParaRPr lang="en-US"/>
           </a:p>
@@ -1937,7 +2046,7 @@
           <a:lstStyle/>
           <a:p>
             <a:fld id="{5F491023-0B0A-7041-9F06-D25A50EF063B}" type="datetimeFigureOut">
-              <a:t>10/19/24</a:t>
+              <a:t>5/10/26</a:t>
             </a:fld>
             <a:endParaRPr lang="en-US"/>
           </a:p>
@@ -2347,7 +2456,7 @@
           <a:lstStyle/>
           <a:p>
             <a:fld id="{5F491023-0B0A-7041-9F06-D25A50EF063B}" type="datetimeFigureOut">
-              <a:t>10/19/24</a:t>
+              <a:t>5/10/26</a:t>
             </a:fld>
             <a:endParaRPr lang="en-US"/>
           </a:p>
@@ -2486,7 +2595,7 @@
           <a:lstStyle/>
           <a:p>
             <a:fld id="{5F491023-0B0A-7041-9F06-D25A50EF063B}" type="datetimeFigureOut">
-              <a:t>10/19/24</a:t>
+              <a:t>5/10/26</a:t>
             </a:fld>
             <a:endParaRPr lang="en-US"/>
           </a:p>
@@ -2597,7 +2706,7 @@
           <a:lstStyle/>
           <a:p>
             <a:fld id="{5F491023-0B0A-7041-9F06-D25A50EF063B}" type="datetimeFigureOut">
-              <a:t>10/19/24</a:t>
+              <a:t>5/10/26</a:t>
             </a:fld>
             <a:endParaRPr lang="en-US"/>
           </a:p>
@@ -2906,7 +3015,7 @@
           <a:lstStyle/>
           <a:p>
             <a:fld id="{5F491023-0B0A-7041-9F06-D25A50EF063B}" type="datetimeFigureOut">
-              <a:t>10/19/24</a:t>
+              <a:t>5/10/26</a:t>
             </a:fld>
             <a:endParaRPr lang="en-US"/>
           </a:p>
@@ -3192,7 +3301,7 @@
           <a:lstStyle/>
           <a:p>
             <a:fld id="{5F491023-0B0A-7041-9F06-D25A50EF063B}" type="datetimeFigureOut">
-              <a:t>10/19/24</a:t>
+              <a:t>5/10/26</a:t>
             </a:fld>
             <a:endParaRPr lang="en-US"/>
           </a:p>
@@ -3431,7 +3540,7 @@
           </a:lstStyle>
           <a:p>
             <a:fld id="{5F491023-0B0A-7041-9F06-D25A50EF063B}" type="datetimeFigureOut">
-              <a:t>10/19/24</a:t>
+              <a:t>5/10/26</a:t>
             </a:fld>
             <a:endParaRPr lang="en-US"/>
           </a:p>
@@ -5584,6 +5693,428 @@
     <p:extLst>
       <p:ext uri="{BB962C8B-B14F-4D97-AF65-F5344CB8AC3E}">
         <p14:creationId xmlns:p14="http://schemas.microsoft.com/office/powerpoint/2010/main" val="4062696701"/>
+      </p:ext>
+    </p:extLst>
+  </p:cSld>
+  <p:clrMapOvr>
+    <a:masterClrMapping/>
+  </p:clrMapOvr>
+</p:sld>
+</file>
+
+<file path=ppt/slides/slide3.xml><?xml version="1.0" encoding="utf-8"?>
+<p:sld xmlns:a="http://schemas.openxmlformats.org/drawingml/2006/main" xmlns:r="http://schemas.openxmlformats.org/officeDocument/2006/relationships" xmlns:p="http://schemas.openxmlformats.org/presentationml/2006/main">
+  <p:cSld>
+    <p:spTree>
+      <p:nvGrpSpPr>
+        <p:cNvPr id="1" name="">
+          <a:extLst>
+            <a:ext uri="{FF2B5EF4-FFF2-40B4-BE49-F238E27FC236}">
+              <a16:creationId xmlns:a16="http://schemas.microsoft.com/office/drawing/2014/main" id="{CA80809D-1B09-8242-592D-24742DD77ACA}"/>
+            </a:ext>
+          </a:extLst>
+        </p:cNvPr>
+        <p:cNvGrpSpPr/>
+        <p:nvPr/>
+      </p:nvGrpSpPr>
+      <p:grpSpPr>
+        <a:xfrm>
+          <a:off x="0" y="0"/>
+          <a:ext cx="0" cy="0"/>
+          <a:chOff x="0" y="0"/>
+          <a:chExt cx="0" cy="0"/>
+        </a:xfrm>
+      </p:grpSpPr>
+      <p:sp>
+        <p:nvSpPr>
+          <p:cNvPr id="2" name="TextBox 1">
+            <a:extLst>
+              <a:ext uri="{FF2B5EF4-FFF2-40B4-BE49-F238E27FC236}">
+                <a16:creationId xmlns:a16="http://schemas.microsoft.com/office/drawing/2014/main" id="{ADFE95FF-0821-2718-3793-905BE80019BF}"/>
+              </a:ext>
+            </a:extLst>
+          </p:cNvPr>
+          <p:cNvSpPr txBox="1"/>
+          <p:nvPr/>
+        </p:nvSpPr>
+        <p:spPr>
+          <a:xfrm>
+            <a:off x="0" y="9719"/>
+            <a:ext cx="3493972" cy="400110"/>
+          </a:xfrm>
+          <a:prstGeom prst="rect">
+            <a:avLst/>
+          </a:prstGeom>
+          <a:noFill/>
+        </p:spPr>
+        <p:txBody>
+          <a:bodyPr wrap="square" rtlCol="0">
+            <a:spAutoFit/>
+          </a:bodyPr>
+          <a:lstStyle/>
+          <a:p>
+            <a:r>
+              <a:rPr lang="en-US" sz="2000" b="1" i="0" dirty="0">
+                <a:solidFill>
+                  <a:srgbClr val="0F1111"/>
+                </a:solidFill>
+                <a:effectLst/>
+                <a:latin typeface="Calibri" panose="020F0502020204030204" pitchFamily="34" charset="0"/>
+                <a:cs typeface="Calibri" panose="020F0502020204030204" pitchFamily="34" charset="0"/>
+              </a:rPr>
+              <a:t>Second Faucet</a:t>
+            </a:r>
+            <a:endParaRPr lang="en-US" sz="2000" b="1" dirty="0">
+              <a:solidFill>
+                <a:srgbClr val="00B0F0"/>
+              </a:solidFill>
+              <a:latin typeface="Calibri" panose="020F0502020204030204" pitchFamily="34" charset="0"/>
+              <a:cs typeface="Calibri" panose="020F0502020204030204" pitchFamily="34" charset="0"/>
+            </a:endParaRPr>
+          </a:p>
+        </p:txBody>
+      </p:sp>
+      <p:sp>
+        <p:nvSpPr>
+          <p:cNvPr id="4" name="TextBox 3">
+            <a:extLst>
+              <a:ext uri="{FF2B5EF4-FFF2-40B4-BE49-F238E27FC236}">
+                <a16:creationId xmlns:a16="http://schemas.microsoft.com/office/drawing/2014/main" id="{B57A79DF-66E7-4FBC-D5AB-2179CDE7AC77}"/>
+              </a:ext>
+            </a:extLst>
+          </p:cNvPr>
+          <p:cNvSpPr txBox="1"/>
+          <p:nvPr/>
+        </p:nvSpPr>
+        <p:spPr>
+          <a:xfrm>
+            <a:off x="4792432" y="3121223"/>
+            <a:ext cx="3048859" cy="400110"/>
+          </a:xfrm>
+          <a:prstGeom prst="rect">
+            <a:avLst/>
+          </a:prstGeom>
+          <a:noFill/>
+        </p:spPr>
+        <p:txBody>
+          <a:bodyPr wrap="square" rtlCol="0">
+            <a:spAutoFit/>
+          </a:bodyPr>
+          <a:lstStyle/>
+          <a:p>
+            <a:r>
+              <a:rPr lang="en-US" sz="2000" b="1" i="0" dirty="0">
+                <a:solidFill>
+                  <a:srgbClr val="131313"/>
+                </a:solidFill>
+                <a:effectLst/>
+                <a:latin typeface="Calibri" panose="020F0502020204030204" pitchFamily="34" charset="0"/>
+                <a:cs typeface="Calibri" panose="020F0502020204030204" pitchFamily="34" charset="0"/>
+              </a:rPr>
+              <a:t>Thread  M26 x 1.0</a:t>
+            </a:r>
+          </a:p>
+        </p:txBody>
+      </p:sp>
+      <p:pic>
+        <p:nvPicPr>
+          <p:cNvPr id="8" name="Picture 7">
+            <a:extLst>
+              <a:ext uri="{FF2B5EF4-FFF2-40B4-BE49-F238E27FC236}">
+                <a16:creationId xmlns:a16="http://schemas.microsoft.com/office/drawing/2014/main" id="{03516384-FF00-91B7-4A75-28D01EF01ACA}"/>
+              </a:ext>
+            </a:extLst>
+          </p:cNvPr>
+          <p:cNvPicPr>
+            <a:picLocks noChangeAspect="1"/>
+          </p:cNvPicPr>
+          <p:nvPr/>
+        </p:nvPicPr>
+        <p:blipFill>
+          <a:blip r:embed="rId3" cstate="email">
+            <a:extLst>
+              <a:ext uri="{28A0092B-C50C-407E-A947-70E740481C1C}">
+                <a14:useLocalDpi xmlns:a14="http://schemas.microsoft.com/office/drawing/2010/main"/>
+              </a:ext>
+            </a:extLst>
+          </a:blip>
+          <a:stretch>
+            <a:fillRect/>
+          </a:stretch>
+        </p:blipFill>
+        <p:spPr>
+          <a:xfrm>
+            <a:off x="8064500" y="209774"/>
+            <a:ext cx="3949700" cy="4229100"/>
+          </a:xfrm>
+          <a:prstGeom prst="rect">
+            <a:avLst/>
+          </a:prstGeom>
+          <a:ln>
+            <a:solidFill>
+              <a:srgbClr val="FF0000"/>
+            </a:solidFill>
+          </a:ln>
+        </p:spPr>
+      </p:pic>
+      <p:pic>
+        <p:nvPicPr>
+          <p:cNvPr id="9" name="Picture 8">
+            <a:extLst>
+              <a:ext uri="{FF2B5EF4-FFF2-40B4-BE49-F238E27FC236}">
+                <a16:creationId xmlns:a16="http://schemas.microsoft.com/office/drawing/2014/main" id="{3D2B8267-6662-9917-C4B5-C69F9561DD1C}"/>
+              </a:ext>
+            </a:extLst>
+          </p:cNvPr>
+          <p:cNvPicPr>
+            <a:picLocks noChangeAspect="1"/>
+          </p:cNvPicPr>
+          <p:nvPr/>
+        </p:nvPicPr>
+        <p:blipFill>
+          <a:blip r:embed="rId4" cstate="email">
+            <a:extLst>
+              <a:ext uri="{28A0092B-C50C-407E-A947-70E740481C1C}">
+                <a14:useLocalDpi xmlns:a14="http://schemas.microsoft.com/office/drawing/2010/main"/>
+              </a:ext>
+            </a:extLst>
+          </a:blip>
+          <a:stretch>
+            <a:fillRect/>
+          </a:stretch>
+        </p:blipFill>
+        <p:spPr>
+          <a:xfrm>
+            <a:off x="4864228" y="209774"/>
+            <a:ext cx="3048859" cy="2773962"/>
+          </a:xfrm>
+          <a:prstGeom prst="rect">
+            <a:avLst/>
+          </a:prstGeom>
+          <a:ln>
+            <a:solidFill>
+              <a:srgbClr val="FF0000"/>
+            </a:solidFill>
+          </a:ln>
+        </p:spPr>
+      </p:pic>
+      <p:pic>
+        <p:nvPicPr>
+          <p:cNvPr id="11" name="Picture 10">
+            <a:extLst>
+              <a:ext uri="{FF2B5EF4-FFF2-40B4-BE49-F238E27FC236}">
+                <a16:creationId xmlns:a16="http://schemas.microsoft.com/office/drawing/2014/main" id="{95B2474F-BA36-4A86-A8A0-CEC3BDC1B5BC}"/>
+              </a:ext>
+            </a:extLst>
+          </p:cNvPr>
+          <p:cNvPicPr>
+            <a:picLocks noChangeAspect="1"/>
+          </p:cNvPicPr>
+          <p:nvPr/>
+        </p:nvPicPr>
+        <p:blipFill>
+          <a:blip r:embed="rId5" cstate="email">
+            <a:extLst>
+              <a:ext uri="{28A0092B-C50C-407E-A947-70E740481C1C}">
+                <a14:useLocalDpi xmlns:a14="http://schemas.microsoft.com/office/drawing/2010/main"/>
+              </a:ext>
+            </a:extLst>
+          </a:blip>
+          <a:stretch>
+            <a:fillRect/>
+          </a:stretch>
+        </p:blipFill>
+        <p:spPr>
+          <a:xfrm>
+            <a:off x="4864228" y="3635375"/>
+            <a:ext cx="3048859" cy="2428876"/>
+          </a:xfrm>
+          <a:prstGeom prst="rect">
+            <a:avLst/>
+          </a:prstGeom>
+          <a:ln>
+            <a:solidFill>
+              <a:srgbClr val="FF0000"/>
+            </a:solidFill>
+          </a:ln>
+        </p:spPr>
+      </p:pic>
+      <p:sp>
+        <p:nvSpPr>
+          <p:cNvPr id="15" name="TextBox 14">
+            <a:extLst>
+              <a:ext uri="{FF2B5EF4-FFF2-40B4-BE49-F238E27FC236}">
+                <a16:creationId xmlns:a16="http://schemas.microsoft.com/office/drawing/2014/main" id="{3528D992-C116-7B09-0511-BD5FBFBD637A}"/>
+              </a:ext>
+            </a:extLst>
+          </p:cNvPr>
+          <p:cNvSpPr txBox="1"/>
+          <p:nvPr/>
+        </p:nvSpPr>
+        <p:spPr>
+          <a:xfrm>
+            <a:off x="35508" y="409829"/>
+            <a:ext cx="4590220" cy="4401205"/>
+          </a:xfrm>
+          <a:prstGeom prst="rect">
+            <a:avLst/>
+          </a:prstGeom>
+          <a:noFill/>
+        </p:spPr>
+        <p:txBody>
+          <a:bodyPr wrap="square" rtlCol="0">
+            <a:spAutoFit/>
+          </a:bodyPr>
+          <a:lstStyle/>
+          <a:p>
+            <a:r>
+              <a:rPr lang="en-US" sz="1400" dirty="0">
+                <a:latin typeface="Calibri" panose="020F0502020204030204" pitchFamily="34" charset="0"/>
+                <a:cs typeface="Calibri" panose="020F0502020204030204" pitchFamily="34" charset="0"/>
+              </a:rPr>
+              <a:t>This faucet has </a:t>
+            </a:r>
+            <a:r>
+              <a:rPr lang="en-US" sz="1400" dirty="0">
+                <a:solidFill>
+                  <a:srgbClr val="131313"/>
+                </a:solidFill>
+                <a:latin typeface="Calibri" panose="020F0502020204030204" pitchFamily="34" charset="0"/>
+                <a:cs typeface="Calibri" panose="020F0502020204030204" pitchFamily="34" charset="0"/>
+              </a:rPr>
+              <a:t>M26 x 1.0 thread</a:t>
+            </a:r>
+          </a:p>
+          <a:p>
+            <a:r>
+              <a:rPr lang="en-US" sz="1400" dirty="0">
+                <a:solidFill>
+                  <a:srgbClr val="131313"/>
+                </a:solidFill>
+                <a:latin typeface="Calibri" panose="020F0502020204030204" pitchFamily="34" charset="0"/>
+                <a:cs typeface="Calibri" panose="020F0502020204030204" pitchFamily="34" charset="0"/>
+              </a:rPr>
+              <a:t>(26mm diameter, 1mm thread pitch).</a:t>
+            </a:r>
+            <a:endParaRPr lang="en-US" sz="1400" dirty="0">
+              <a:latin typeface="Calibri" panose="020F0502020204030204" pitchFamily="34" charset="0"/>
+              <a:cs typeface="Calibri" panose="020F0502020204030204" pitchFamily="34" charset="0"/>
+            </a:endParaRPr>
+          </a:p>
+          <a:p>
+            <a:endParaRPr lang="en-US" sz="1400" dirty="0">
+              <a:latin typeface="Calibri" panose="020F0502020204030204" pitchFamily="34" charset="0"/>
+              <a:cs typeface="Calibri" panose="020F0502020204030204" pitchFamily="34" charset="0"/>
+            </a:endParaRPr>
+          </a:p>
+          <a:p>
+            <a:r>
+              <a:rPr lang="en-US" sz="1400" dirty="0">
+                <a:latin typeface="Calibri" panose="020F0502020204030204" pitchFamily="34" charset="0"/>
+                <a:cs typeface="Calibri" panose="020F0502020204030204" pitchFamily="34" charset="0"/>
+              </a:rPr>
+              <a:t>We need adapter: M26 female to G1/2 male.</a:t>
+            </a:r>
+          </a:p>
+          <a:p>
+            <a:endParaRPr lang="en-US" sz="1400" dirty="0">
+              <a:latin typeface="Calibri" panose="020F0502020204030204" pitchFamily="34" charset="0"/>
+              <a:cs typeface="Calibri" panose="020F0502020204030204" pitchFamily="34" charset="0"/>
+            </a:endParaRPr>
+          </a:p>
+          <a:p>
+            <a:r>
+              <a:rPr lang="en-US" sz="1400" dirty="0">
+                <a:latin typeface="Calibri" panose="020F0502020204030204" pitchFamily="34" charset="0"/>
+                <a:cs typeface="Calibri" panose="020F0502020204030204" pitchFamily="34" charset="0"/>
+              </a:rPr>
+              <a:t>G1/2 is the universal standard connection used on shower hoses and handheld showerheads worldwide.</a:t>
+            </a:r>
+          </a:p>
+          <a:p>
+            <a:endParaRPr lang="en-US" sz="1400" dirty="0">
+              <a:latin typeface="Calibri" panose="020F0502020204030204" pitchFamily="34" charset="0"/>
+              <a:cs typeface="Calibri" panose="020F0502020204030204" pitchFamily="34" charset="0"/>
+            </a:endParaRPr>
+          </a:p>
+          <a:p>
+            <a:r>
+              <a:rPr lang="en-US" sz="1400" dirty="0">
+                <a:latin typeface="Calibri" panose="020F0502020204030204" pitchFamily="34" charset="0"/>
+                <a:cs typeface="Calibri" panose="020F0502020204030204" pitchFamily="34" charset="0"/>
+              </a:rPr>
+              <a:t>G½" Male is a straight-threaded fitting with external (outside) threads, 20.9 mm outer diameter, 14 threads per inch. It follows the BSPP (British Standard Pipe Parallel) standard, also called ISO 228. Unlike tapered pipe threads, it seals via a rubber washer or O-ring, not thread compression</a:t>
+            </a:r>
+          </a:p>
+          <a:p>
+            <a:endParaRPr lang="en-US" sz="1400" dirty="0">
+              <a:latin typeface="Calibri" panose="020F0502020204030204" pitchFamily="34" charset="0"/>
+              <a:cs typeface="Calibri" panose="020F0502020204030204" pitchFamily="34" charset="0"/>
+            </a:endParaRPr>
+          </a:p>
+          <a:p>
+            <a:r>
+              <a:rPr lang="en-US" sz="1400" dirty="0">
+                <a:latin typeface="Calibri" panose="020F0502020204030204" pitchFamily="34" charset="0"/>
+                <a:cs typeface="Calibri" panose="020F0502020204030204" pitchFamily="34" charset="0"/>
+              </a:rPr>
+              <a:t>Standard shower hose has  G1/2 female (internal) threads on both ends — the swivel nut screws over a male threaded outlet.</a:t>
+            </a:r>
+          </a:p>
+          <a:p>
+            <a:endParaRPr lang="en-US" sz="1400" dirty="0">
+              <a:latin typeface="Calibri" panose="020F0502020204030204" pitchFamily="34" charset="0"/>
+              <a:cs typeface="Calibri" panose="020F0502020204030204" pitchFamily="34" charset="0"/>
+            </a:endParaRPr>
+          </a:p>
+          <a:p>
+            <a:endParaRPr lang="en-US" sz="1400" dirty="0">
+              <a:latin typeface="Calibri" panose="020F0502020204030204" pitchFamily="34" charset="0"/>
+              <a:cs typeface="Calibri" panose="020F0502020204030204" pitchFamily="34" charset="0"/>
+            </a:endParaRPr>
+          </a:p>
+        </p:txBody>
+      </p:sp>
+      <p:pic>
+        <p:nvPicPr>
+          <p:cNvPr id="17" name="Picture 16">
+            <a:extLst>
+              <a:ext uri="{FF2B5EF4-FFF2-40B4-BE49-F238E27FC236}">
+                <a16:creationId xmlns:a16="http://schemas.microsoft.com/office/drawing/2014/main" id="{02F617CC-5267-6576-33D1-836696956371}"/>
+              </a:ext>
+            </a:extLst>
+          </p:cNvPr>
+          <p:cNvPicPr>
+            <a:picLocks noChangeAspect="1"/>
+          </p:cNvPicPr>
+          <p:nvPr/>
+        </p:nvPicPr>
+        <p:blipFill>
+          <a:blip r:embed="rId6" cstate="email">
+            <a:extLst>
+              <a:ext uri="{28A0092B-C50C-407E-A947-70E740481C1C}">
+                <a14:useLocalDpi xmlns:a14="http://schemas.microsoft.com/office/drawing/2010/main"/>
+              </a:ext>
+            </a:extLst>
+          </a:blip>
+          <a:stretch>
+            <a:fillRect/>
+          </a:stretch>
+        </p:blipFill>
+        <p:spPr>
+          <a:xfrm>
+            <a:off x="1208612" y="4212330"/>
+            <a:ext cx="2166823" cy="2337439"/>
+          </a:xfrm>
+          <a:prstGeom prst="rect">
+            <a:avLst/>
+          </a:prstGeom>
+        </p:spPr>
+      </p:pic>
+    </p:spTree>
+    <p:extLst>
+      <p:ext uri="{BB962C8B-B14F-4D97-AF65-F5344CB8AC3E}">
+        <p14:creationId xmlns:p14="http://schemas.microsoft.com/office/powerpoint/2010/main" val="3122938345"/>
       </p:ext>
     </p:extLst>
   </p:cSld>

--- a/faucets.pptx
+++ b/faucets.pptx
@@ -199,7 +199,7 @@
           <a:p>
             <a:fld id="{D2843BDE-B8C0-934E-9704-CBA3B88C1FB8}" type="datetimeFigureOut">
               <a:rPr lang="en-US" smtClean="0"/>
-              <a:t>5/10/26</a:t>
+              <a:t>7/16/26</a:t>
             </a:fld>
             <a:endParaRPr lang="en-US"/>
           </a:p>
@@ -912,7 +912,7 @@
           <a:lstStyle/>
           <a:p>
             <a:fld id="{5F491023-0B0A-7041-9F06-D25A50EF063B}" type="datetimeFigureOut">
-              <a:t>5/10/26</a:t>
+              <a:t>7/16/26</a:t>
             </a:fld>
             <a:endParaRPr lang="en-US"/>
           </a:p>
@@ -1108,7 +1108,7 @@
           <a:lstStyle/>
           <a:p>
             <a:fld id="{5F491023-0B0A-7041-9F06-D25A50EF063B}" type="datetimeFigureOut">
-              <a:t>5/10/26</a:t>
+              <a:t>7/16/26</a:t>
             </a:fld>
             <a:endParaRPr lang="en-US"/>
           </a:p>
@@ -1314,7 +1314,7 @@
           <a:lstStyle/>
           <a:p>
             <a:fld id="{5F491023-0B0A-7041-9F06-D25A50EF063B}" type="datetimeFigureOut">
-              <a:t>5/10/26</a:t>
+              <a:t>7/16/26</a:t>
             </a:fld>
             <a:endParaRPr lang="en-US"/>
           </a:p>
@@ -1510,7 +1510,7 @@
           <a:lstStyle/>
           <a:p>
             <a:fld id="{5F491023-0B0A-7041-9F06-D25A50EF063B}" type="datetimeFigureOut">
-              <a:t>5/10/26</a:t>
+              <a:t>7/16/26</a:t>
             </a:fld>
             <a:endParaRPr lang="en-US"/>
           </a:p>
@@ -1783,7 +1783,7 @@
           <a:lstStyle/>
           <a:p>
             <a:fld id="{5F491023-0B0A-7041-9F06-D25A50EF063B}" type="datetimeFigureOut">
-              <a:t>5/10/26</a:t>
+              <a:t>7/16/26</a:t>
             </a:fld>
             <a:endParaRPr lang="en-US"/>
           </a:p>
@@ -2046,7 +2046,7 @@
           <a:lstStyle/>
           <a:p>
             <a:fld id="{5F491023-0B0A-7041-9F06-D25A50EF063B}" type="datetimeFigureOut">
-              <a:t>5/10/26</a:t>
+              <a:t>7/16/26</a:t>
             </a:fld>
             <a:endParaRPr lang="en-US"/>
           </a:p>
@@ -2456,7 +2456,7 @@
           <a:lstStyle/>
           <a:p>
             <a:fld id="{5F491023-0B0A-7041-9F06-D25A50EF063B}" type="datetimeFigureOut">
-              <a:t>5/10/26</a:t>
+              <a:t>7/16/26</a:t>
             </a:fld>
             <a:endParaRPr lang="en-US"/>
           </a:p>
@@ -2595,7 +2595,7 @@
           <a:lstStyle/>
           <a:p>
             <a:fld id="{5F491023-0B0A-7041-9F06-D25A50EF063B}" type="datetimeFigureOut">
-              <a:t>5/10/26</a:t>
+              <a:t>7/16/26</a:t>
             </a:fld>
             <a:endParaRPr lang="en-US"/>
           </a:p>
@@ -2706,7 +2706,7 @@
           <a:lstStyle/>
           <a:p>
             <a:fld id="{5F491023-0B0A-7041-9F06-D25A50EF063B}" type="datetimeFigureOut">
-              <a:t>5/10/26</a:t>
+              <a:t>7/16/26</a:t>
             </a:fld>
             <a:endParaRPr lang="en-US"/>
           </a:p>
@@ -3015,7 +3015,7 @@
           <a:lstStyle/>
           <a:p>
             <a:fld id="{5F491023-0B0A-7041-9F06-D25A50EF063B}" type="datetimeFigureOut">
-              <a:t>5/10/26</a:t>
+              <a:t>7/16/26</a:t>
             </a:fld>
             <a:endParaRPr lang="en-US"/>
           </a:p>
@@ -3301,7 +3301,7 @@
           <a:lstStyle/>
           <a:p>
             <a:fld id="{5F491023-0B0A-7041-9F06-D25A50EF063B}" type="datetimeFigureOut">
-              <a:t>5/10/26</a:t>
+              <a:t>7/16/26</a:t>
             </a:fld>
             <a:endParaRPr lang="en-US"/>
           </a:p>
@@ -3540,7 +3540,7 @@
           </a:lstStyle>
           <a:p>
             <a:fld id="{5F491023-0B0A-7041-9F06-D25A50EF063B}" type="datetimeFigureOut">
-              <a:t>5/10/26</a:t>
+              <a:t>7/16/26</a:t>
             </a:fld>
             <a:endParaRPr lang="en-US"/>
           </a:p>
@@ -5954,7 +5954,7 @@
         <p:spPr>
           <a:xfrm>
             <a:off x="35508" y="409829"/>
-            <a:ext cx="4590220" cy="4401205"/>
+            <a:ext cx="4590220" cy="3323987"/>
           </a:xfrm>
           <a:prstGeom prst="rect">
             <a:avLst/>
@@ -5967,12 +5967,44 @@
           </a:bodyPr>
           <a:lstStyle/>
           <a:p>
+            <a:pPr marL="285750" indent="-285750">
+              <a:buFont typeface="Arial" panose="020B0604020202020204" pitchFamily="34" charset="0"/>
+              <a:buChar char="•"/>
+            </a:pPr>
             <a:r>
               <a:rPr lang="en-US" sz="1400" dirty="0">
                 <a:latin typeface="Calibri" panose="020F0502020204030204" pitchFamily="34" charset="0"/>
                 <a:cs typeface="Calibri" panose="020F0502020204030204" pitchFamily="34" charset="0"/>
               </a:rPr>
-              <a:t>This faucet has </a:t>
+              <a:t>"T2755RB" - Delta Tub Filler Faucet Victorian Venetian Bronze</a:t>
+            </a:r>
+          </a:p>
+          <a:p>
+            <a:pPr marL="285750" indent="-285750">
+              <a:buFont typeface="Arial" panose="020B0604020202020204" pitchFamily="34" charset="0"/>
+              <a:buChar char="•"/>
+            </a:pPr>
+            <a:r>
+              <a:rPr lang="en-US" sz="1400" dirty="0">
+                <a:latin typeface="Calibri" panose="020F0502020204030204" pitchFamily="34" charset="0"/>
+                <a:cs typeface="Calibri" panose="020F0502020204030204" pitchFamily="34" charset="0"/>
+              </a:rPr>
+              <a:t>" RP34348RB " - Spout Tip for Delta Faucet Victorian for Roman Tub, Venetian Bronze</a:t>
+            </a:r>
+          </a:p>
+          <a:p>
+            <a:endParaRPr lang="en-US" sz="1400" dirty="0">
+              <a:latin typeface="Calibri" panose="020F0502020204030204" pitchFamily="34" charset="0"/>
+              <a:cs typeface="Calibri" panose="020F0502020204030204" pitchFamily="34" charset="0"/>
+            </a:endParaRPr>
+          </a:p>
+          <a:p>
+            <a:r>
+              <a:rPr lang="en-US" sz="1400" dirty="0">
+                <a:latin typeface="Calibri" panose="020F0502020204030204" pitchFamily="34" charset="0"/>
+                <a:cs typeface="Calibri" panose="020F0502020204030204" pitchFamily="34" charset="0"/>
+              </a:rPr>
+              <a:t>Manual measurement: </a:t>
             </a:r>
             <a:r>
               <a:rPr lang="en-US" sz="1400" dirty="0">
@@ -6013,14 +6045,18 @@
                 <a:latin typeface="Calibri" panose="020F0502020204030204" pitchFamily="34" charset="0"/>
                 <a:cs typeface="Calibri" panose="020F0502020204030204" pitchFamily="34" charset="0"/>
               </a:rPr>
-              <a:t>We need adapter: M26 female to G1/2 male.</a:t>
-            </a:r>
-          </a:p>
-          <a:p>
-            <a:endParaRPr lang="en-US" sz="1400" dirty="0">
-              <a:latin typeface="Calibri" panose="020F0502020204030204" pitchFamily="34" charset="0"/>
-              <a:cs typeface="Calibri" panose="020F0502020204030204" pitchFamily="34" charset="0"/>
-            </a:endParaRPr>
+              <a:t>We need adapter: </a:t>
+            </a:r>
+            <a:r>
+              <a:rPr lang="en-US" sz="1400" b="1" dirty="0">
+                <a:solidFill>
+                  <a:srgbClr val="FF0000"/>
+                </a:solidFill>
+                <a:latin typeface="Calibri" panose="020F0502020204030204" pitchFamily="34" charset="0"/>
+                <a:cs typeface="Calibri" panose="020F0502020204030204" pitchFamily="34" charset="0"/>
+              </a:rPr>
+              <a:t>M26 female to G1/2" male</a:t>
+            </a:r>
           </a:p>
           <a:p>
             <a:r>
@@ -6028,50 +6064,8 @@
                 <a:latin typeface="Calibri" panose="020F0502020204030204" pitchFamily="34" charset="0"/>
                 <a:cs typeface="Calibri" panose="020F0502020204030204" pitchFamily="34" charset="0"/>
               </a:rPr>
-              <a:t>G1/2 is the universal standard connection used on shower hoses and handheld showerheads worldwide.</a:t>
-            </a:r>
-          </a:p>
-          <a:p>
-            <a:endParaRPr lang="en-US" sz="1400" dirty="0">
-              <a:latin typeface="Calibri" panose="020F0502020204030204" pitchFamily="34" charset="0"/>
-              <a:cs typeface="Calibri" panose="020F0502020204030204" pitchFamily="34" charset="0"/>
-            </a:endParaRPr>
-          </a:p>
-          <a:p>
-            <a:r>
-              <a:rPr lang="en-US" sz="1400" dirty="0">
-                <a:latin typeface="Calibri" panose="020F0502020204030204" pitchFamily="34" charset="0"/>
-                <a:cs typeface="Calibri" panose="020F0502020204030204" pitchFamily="34" charset="0"/>
-              </a:rPr>
-              <a:t>G½" Male is a straight-threaded fitting with external (outside) threads, 20.9 mm outer diameter, 14 threads per inch. It follows the BSPP (British Standard Pipe Parallel) standard, also called ISO 228. Unlike tapered pipe threads, it seals via a rubber washer or O-ring, not thread compression</a:t>
-            </a:r>
-          </a:p>
-          <a:p>
-            <a:endParaRPr lang="en-US" sz="1400" dirty="0">
-              <a:latin typeface="Calibri" panose="020F0502020204030204" pitchFamily="34" charset="0"/>
-              <a:cs typeface="Calibri" panose="020F0502020204030204" pitchFamily="34" charset="0"/>
-            </a:endParaRPr>
-          </a:p>
-          <a:p>
-            <a:r>
-              <a:rPr lang="en-US" sz="1400" dirty="0">
-                <a:latin typeface="Calibri" panose="020F0502020204030204" pitchFamily="34" charset="0"/>
-                <a:cs typeface="Calibri" panose="020F0502020204030204" pitchFamily="34" charset="0"/>
-              </a:rPr>
-              <a:t>Standard shower hose has  G1/2 female (internal) threads on both ends — the swivel nut screws over a male threaded outlet.</a:t>
-            </a:r>
-          </a:p>
-          <a:p>
-            <a:endParaRPr lang="en-US" sz="1400" dirty="0">
-              <a:latin typeface="Calibri" panose="020F0502020204030204" pitchFamily="34" charset="0"/>
-              <a:cs typeface="Calibri" panose="020F0502020204030204" pitchFamily="34" charset="0"/>
-            </a:endParaRPr>
-          </a:p>
-          <a:p>
-            <a:endParaRPr lang="en-US" sz="1400" dirty="0">
-              <a:latin typeface="Calibri" panose="020F0502020204030204" pitchFamily="34" charset="0"/>
-              <a:cs typeface="Calibri" panose="020F0502020204030204" pitchFamily="34" charset="0"/>
-            </a:endParaRPr>
+              <a:t>G1/2" male is a universal standard straight-threaded fitting for shower hoses and handheld showerheads worldwide. 20.9 mm outer diameter, 14 threads per inch. It follows the BSPP (British Standard Pipe Parallel) standard, also called ISO 228. Unlike tapered pipe threads, it seals via a rubber washer or O-ring, not thread compression</a:t>
+            </a:r>
           </a:p>
         </p:txBody>
       </p:sp>
@@ -6097,14 +6091,15 @@
               </a:ext>
             </a:extLst>
           </a:blip>
+          <a:srcRect/>
           <a:stretch>
             <a:fillRect/>
           </a:stretch>
         </p:blipFill>
         <p:spPr>
           <a:xfrm>
-            <a:off x="1208612" y="4212330"/>
-            <a:ext cx="2166823" cy="2337439"/>
+            <a:off x="978019" y="3835401"/>
+            <a:ext cx="2166823" cy="1514475"/>
           </a:xfrm>
           <a:prstGeom prst="rect">
             <a:avLst/>
